--- a/Final Presentation.pptx
+++ b/Final Presentation.pptx
@@ -118,6 +118,11 @@
       </a:defRPr>
     </a:lvl9pPr>
   </p:defaultTextStyle>
+  <p:extLst>
+    <p:ext uri="{EFAFB233-063F-42B5-8137-9DF3F51BA10A}">
+      <p15:sldGuideLst xmlns:p15="http://schemas.microsoft.com/office/powerpoint/2012/main"/>
+    </p:ext>
+  </p:extLst>
 </p:presentation>
 </file>
 
@@ -925,10 +930,10 @@
         <a:lstStyle/>
         <a:p>
           <a:r>
-            <a:rPr lang="en-US" dirty="0" smtClean="0"/>
+            <a:rPr lang="en-US" b="1" dirty="0" smtClean="0"/>
             <a:t>Checking Missing Values</a:t>
           </a:r>
-          <a:endParaRPr lang="en-US" dirty="0"/>
+          <a:endParaRPr lang="en-US" b="1" dirty="0"/>
         </a:p>
       </dgm:t>
     </dgm:pt>
@@ -1015,10 +1020,10 @@
         <a:lstStyle/>
         <a:p>
           <a:r>
-            <a:rPr lang="en-US" dirty="0" smtClean="0"/>
+            <a:rPr lang="en-US" b="1" dirty="0" smtClean="0"/>
             <a:t>Checking Duplicates </a:t>
           </a:r>
-          <a:endParaRPr lang="en-US" dirty="0"/>
+          <a:endParaRPr lang="en-US" b="1" dirty="0"/>
         </a:p>
       </dgm:t>
     </dgm:pt>
@@ -1105,10 +1110,10 @@
         <a:lstStyle/>
         <a:p>
           <a:r>
-            <a:rPr lang="en-US" dirty="0" smtClean="0"/>
+            <a:rPr lang="en-US" b="1" dirty="0" smtClean="0"/>
             <a:t>Checking and Transforming Outliers</a:t>
           </a:r>
-          <a:endParaRPr lang="en-US" dirty="0"/>
+          <a:endParaRPr lang="en-US" b="1" dirty="0"/>
         </a:p>
       </dgm:t>
     </dgm:pt>
@@ -1304,6 +1309,13 @@
         </dgm:presLayoutVars>
       </dgm:prSet>
       <dgm:spPr/>
+      <dgm:t>
+        <a:bodyPr/>
+        <a:lstStyle/>
+        <a:p>
+          <a:endParaRPr lang="en-US"/>
+        </a:p>
+      </dgm:t>
     </dgm:pt>
     <dgm:pt modelId="{DEE2D638-0CC6-4C68-8664-2914F0C5F018}" type="pres">
       <dgm:prSet presAssocID="{EADDEF84-465A-469B-AE12-CF1AF660680F}" presName="ParentComposite" presStyleCnt="0"/>
@@ -1326,6 +1338,13 @@
         </dgm:presLayoutVars>
       </dgm:prSet>
       <dgm:spPr/>
+      <dgm:t>
+        <a:bodyPr/>
+        <a:lstStyle/>
+        <a:p>
+          <a:endParaRPr lang="en-US"/>
+        </a:p>
+      </dgm:t>
     </dgm:pt>
     <dgm:pt modelId="{03ED16B1-9EE9-4D5A-96B3-964FFBCF2E66}" type="pres">
       <dgm:prSet presAssocID="{B6948A14-ED62-4587-AC2E-69D0808E0D01}" presName="negSibTrans" presStyleCnt="0"/>
@@ -1470,23 +1489,23 @@
     </dgm:pt>
   </dgm:ptLst>
   <dgm:cxnLst>
+    <dgm:cxn modelId="{0EF4AC2C-D222-438C-98F5-C7F9A114E75C}" srcId="{EADDEF84-465A-469B-AE12-CF1AF660680F}" destId="{DD3983B2-CCE0-4C40-B5B5-557650AF362A}" srcOrd="0" destOrd="0" parTransId="{8C59F8BF-A15C-43FD-B6C0-25F669DA6670}" sibTransId="{B6948A14-ED62-4587-AC2E-69D0808E0D01}"/>
+    <dgm:cxn modelId="{8E1A0694-CA78-40F9-9C7A-412DD05A614B}" type="presOf" srcId="{8747652F-4181-4A3D-8167-52FE7819723E}" destId="{A6AC1F14-A500-47A1-BFCF-540BB4584AA2}" srcOrd="0" destOrd="2" presId="urn:microsoft.com/office/officeart/2009/3/layout/PieProcess"/>
+    <dgm:cxn modelId="{6DA5D5DA-1649-404F-B2B2-907950A7F47E}" srcId="{0B837632-1894-4FCA-90F6-D137D7BCD00B}" destId="{EDA5E44D-4390-4F2E-AAFF-015A725185FF}" srcOrd="0" destOrd="0" parTransId="{D3F99577-FE5B-4C54-A525-AB3E83E8A203}" sibTransId="{B8C173C7-3B93-41FD-8533-8B32B8EBB834}"/>
+    <dgm:cxn modelId="{80C127A8-67A6-467A-AEFF-2228BD3096B5}" type="presOf" srcId="{4F87F431-1918-4E75-87CF-49CC509EC811}" destId="{A6AC1F14-A500-47A1-BFCF-540BB4584AA2}" srcOrd="0" destOrd="1" presId="urn:microsoft.com/office/officeart/2009/3/layout/PieProcess"/>
+    <dgm:cxn modelId="{16857CA2-CCF6-4F31-9037-760E1469A80C}" srcId="{0B837632-1894-4FCA-90F6-D137D7BCD00B}" destId="{4F87F431-1918-4E75-87CF-49CC509EC811}" srcOrd="1" destOrd="0" parTransId="{EB8ECB99-7355-4EB1-8368-6E5D8BF9F958}" sibTransId="{854AD0E3-1876-408A-AFB9-BFB96C74F0FD}"/>
+    <dgm:cxn modelId="{2362E513-41BA-4899-8DBB-8352666BD710}" srcId="{E4B776F7-E6CF-4D44-B6A7-634EE60D5BF0}" destId="{3FDEE9E7-42B9-42FD-8082-8FFF8CDAB00E}" srcOrd="0" destOrd="0" parTransId="{DBF1A505-7E75-468F-83A4-AC13F05C8D8B}" sibTransId="{9DE3237A-9672-491C-8A03-9B54313667BF}"/>
+    <dgm:cxn modelId="{A58A79D4-F477-46E6-99EC-D121CD4B414B}" type="presOf" srcId="{DD3983B2-CCE0-4C40-B5B5-557650AF362A}" destId="{B7690194-DAEB-4E5B-AB7C-DB67A7ED3818}" srcOrd="0" destOrd="0" presId="urn:microsoft.com/office/officeart/2009/3/layout/PieProcess"/>
+    <dgm:cxn modelId="{32614D8E-3DED-4BC4-A17F-BEF23FC9BE4B}" type="presOf" srcId="{0B837632-1894-4FCA-90F6-D137D7BCD00B}" destId="{AD0AB4B1-9B1B-4DF2-A437-8F568DA3FCC8}" srcOrd="0" destOrd="0" presId="urn:microsoft.com/office/officeart/2009/3/layout/PieProcess"/>
+    <dgm:cxn modelId="{B1ADBD87-447D-41AC-8CFF-E693D58B32E6}" type="presOf" srcId="{EDA5E44D-4390-4F2E-AAFF-015A725185FF}" destId="{A6AC1F14-A500-47A1-BFCF-540BB4584AA2}" srcOrd="0" destOrd="0" presId="urn:microsoft.com/office/officeart/2009/3/layout/PieProcess"/>
+    <dgm:cxn modelId="{C402C52E-7989-4903-843E-990C15691298}" srcId="{6E0D9D9C-8E55-44F1-BAA7-896C43AE16A9}" destId="{0B837632-1894-4FCA-90F6-D137D7BCD00B}" srcOrd="2" destOrd="0" parTransId="{20D10001-B8E7-4F89-863F-087F0FF6F470}" sibTransId="{7436620E-1753-407D-8FFA-57540BA6C617}"/>
     <dgm:cxn modelId="{131DEB93-161B-4087-8C72-352F1BA17847}" srcId="{6E0D9D9C-8E55-44F1-BAA7-896C43AE16A9}" destId="{EADDEF84-465A-469B-AE12-CF1AF660680F}" srcOrd="0" destOrd="0" parTransId="{8A39121B-119C-4022-AD2B-E8E4A7AF6027}" sibTransId="{FA694258-AEFB-4B23-B22F-AA02019ACF77}"/>
-    <dgm:cxn modelId="{8E1A0694-CA78-40F9-9C7A-412DD05A614B}" type="presOf" srcId="{8747652F-4181-4A3D-8167-52FE7819723E}" destId="{A6AC1F14-A500-47A1-BFCF-540BB4584AA2}" srcOrd="0" destOrd="2" presId="urn:microsoft.com/office/officeart/2009/3/layout/PieProcess"/>
-    <dgm:cxn modelId="{A58A79D4-F477-46E6-99EC-D121CD4B414B}" type="presOf" srcId="{DD3983B2-CCE0-4C40-B5B5-557650AF362A}" destId="{B7690194-DAEB-4E5B-AB7C-DB67A7ED3818}" srcOrd="0" destOrd="0" presId="urn:microsoft.com/office/officeart/2009/3/layout/PieProcess"/>
-    <dgm:cxn modelId="{2362E513-41BA-4899-8DBB-8352666BD710}" srcId="{E4B776F7-E6CF-4D44-B6A7-634EE60D5BF0}" destId="{3FDEE9E7-42B9-42FD-8082-8FFF8CDAB00E}" srcOrd="0" destOrd="0" parTransId="{DBF1A505-7E75-468F-83A4-AC13F05C8D8B}" sibTransId="{9DE3237A-9672-491C-8A03-9B54313667BF}"/>
-    <dgm:cxn modelId="{822EBFC9-8EC3-4664-807F-763F37206EB0}" srcId="{6E0D9D9C-8E55-44F1-BAA7-896C43AE16A9}" destId="{E4B776F7-E6CF-4D44-B6A7-634EE60D5BF0}" srcOrd="1" destOrd="0" parTransId="{6E269B69-3A3E-403D-BA69-2D17944E6956}" sibTransId="{E31D8CD8-F53D-4FF9-9A29-4B73817B6CAB}"/>
-    <dgm:cxn modelId="{637F73CA-82DA-4FAD-B741-2A93B9777AE3}" type="presOf" srcId="{EADDEF84-465A-469B-AE12-CF1AF660680F}" destId="{382450F0-2E25-4A86-B3A0-3FD2B8F1F567}" srcOrd="0" destOrd="0" presId="urn:microsoft.com/office/officeart/2009/3/layout/PieProcess"/>
-    <dgm:cxn modelId="{6DA5D5DA-1649-404F-B2B2-907950A7F47E}" srcId="{0B837632-1894-4FCA-90F6-D137D7BCD00B}" destId="{EDA5E44D-4390-4F2E-AAFF-015A725185FF}" srcOrd="0" destOrd="0" parTransId="{D3F99577-FE5B-4C54-A525-AB3E83E8A203}" sibTransId="{B8C173C7-3B93-41FD-8533-8B32B8EBB834}"/>
-    <dgm:cxn modelId="{B1ADBD87-447D-41AC-8CFF-E693D58B32E6}" type="presOf" srcId="{EDA5E44D-4390-4F2E-AAFF-015A725185FF}" destId="{A6AC1F14-A500-47A1-BFCF-540BB4584AA2}" srcOrd="0" destOrd="0" presId="urn:microsoft.com/office/officeart/2009/3/layout/PieProcess"/>
     <dgm:cxn modelId="{8B2E0162-C2D5-4AA5-BC5D-705A3C87CB2E}" srcId="{0B837632-1894-4FCA-90F6-D137D7BCD00B}" destId="{8747652F-4181-4A3D-8167-52FE7819723E}" srcOrd="2" destOrd="0" parTransId="{85B64BAE-F49A-4B9D-9FCA-01F27AC8C9CB}" sibTransId="{572F722B-5F29-4184-B660-068277EF4EB2}"/>
     <dgm:cxn modelId="{359A4468-0FB4-48C9-9150-0CFCD9926D9E}" type="presOf" srcId="{E4B776F7-E6CF-4D44-B6A7-634EE60D5BF0}" destId="{821D1612-9A0C-4470-8060-04AC6DFEA511}" srcOrd="0" destOrd="0" presId="urn:microsoft.com/office/officeart/2009/3/layout/PieProcess"/>
-    <dgm:cxn modelId="{C402C52E-7989-4903-843E-990C15691298}" srcId="{6E0D9D9C-8E55-44F1-BAA7-896C43AE16A9}" destId="{0B837632-1894-4FCA-90F6-D137D7BCD00B}" srcOrd="2" destOrd="0" parTransId="{20D10001-B8E7-4F89-863F-087F0FF6F470}" sibTransId="{7436620E-1753-407D-8FFA-57540BA6C617}"/>
-    <dgm:cxn modelId="{80C127A8-67A6-467A-AEFF-2228BD3096B5}" type="presOf" srcId="{4F87F431-1918-4E75-87CF-49CC509EC811}" destId="{A6AC1F14-A500-47A1-BFCF-540BB4584AA2}" srcOrd="0" destOrd="1" presId="urn:microsoft.com/office/officeart/2009/3/layout/PieProcess"/>
-    <dgm:cxn modelId="{16857CA2-CCF6-4F31-9037-760E1469A80C}" srcId="{0B837632-1894-4FCA-90F6-D137D7BCD00B}" destId="{4F87F431-1918-4E75-87CF-49CC509EC811}" srcOrd="1" destOrd="0" parTransId="{EB8ECB99-7355-4EB1-8368-6E5D8BF9F958}" sibTransId="{854AD0E3-1876-408A-AFB9-BFB96C74F0FD}"/>
-    <dgm:cxn modelId="{0EF4AC2C-D222-438C-98F5-C7F9A114E75C}" srcId="{EADDEF84-465A-469B-AE12-CF1AF660680F}" destId="{DD3983B2-CCE0-4C40-B5B5-557650AF362A}" srcOrd="0" destOrd="0" parTransId="{8C59F8BF-A15C-43FD-B6C0-25F669DA6670}" sibTransId="{B6948A14-ED62-4587-AC2E-69D0808E0D01}"/>
-    <dgm:cxn modelId="{32614D8E-3DED-4BC4-A17F-BEF23FC9BE4B}" type="presOf" srcId="{0B837632-1894-4FCA-90F6-D137D7BCD00B}" destId="{AD0AB4B1-9B1B-4DF2-A437-8F568DA3FCC8}" srcOrd="0" destOrd="0" presId="urn:microsoft.com/office/officeart/2009/3/layout/PieProcess"/>
     <dgm:cxn modelId="{68C395D2-877B-4AB6-AE3F-2FE631F46E11}" type="presOf" srcId="{6E0D9D9C-8E55-44F1-BAA7-896C43AE16A9}" destId="{57ECA2FF-3C47-460F-BFF8-619EB498F40B}" srcOrd="0" destOrd="0" presId="urn:microsoft.com/office/officeart/2009/3/layout/PieProcess"/>
+    <dgm:cxn modelId="{637F73CA-82DA-4FAD-B741-2A93B9777AE3}" type="presOf" srcId="{EADDEF84-465A-469B-AE12-CF1AF660680F}" destId="{382450F0-2E25-4A86-B3A0-3FD2B8F1F567}" srcOrd="0" destOrd="0" presId="urn:microsoft.com/office/officeart/2009/3/layout/PieProcess"/>
     <dgm:cxn modelId="{520278E8-0DEA-41F5-8043-E96C8F88A769}" type="presOf" srcId="{3FDEE9E7-42B9-42FD-8082-8FFF8CDAB00E}" destId="{9E76B566-1070-40F7-95F6-38CFF576C21E}" srcOrd="0" destOrd="0" presId="urn:microsoft.com/office/officeart/2009/3/layout/PieProcess"/>
+    <dgm:cxn modelId="{822EBFC9-8EC3-4664-807F-763F37206EB0}" srcId="{6E0D9D9C-8E55-44F1-BAA7-896C43AE16A9}" destId="{E4B776F7-E6CF-4D44-B6A7-634EE60D5BF0}" srcOrd="1" destOrd="0" parTransId="{6E269B69-3A3E-403D-BA69-2D17944E6956}" sibTransId="{E31D8CD8-F53D-4FF9-9A29-4B73817B6CAB}"/>
     <dgm:cxn modelId="{AE1376D5-2ECB-4DB9-842C-4D15C1528F57}" type="presParOf" srcId="{57ECA2FF-3C47-460F-BFF8-619EB498F40B}" destId="{DEE2D638-0CC6-4C68-8664-2914F0C5F018}" srcOrd="0" destOrd="0" presId="urn:microsoft.com/office/officeart/2009/3/layout/PieProcess"/>
     <dgm:cxn modelId="{077996C6-5BAF-4921-8029-4BCFE07FC625}" type="presParOf" srcId="{DEE2D638-0CC6-4C68-8664-2914F0C5F018}" destId="{6EE121A7-30C2-4993-9520-69D196B0F348}" srcOrd="0" destOrd="0" presId="urn:microsoft.com/office/officeart/2009/3/layout/PieProcess"/>
     <dgm:cxn modelId="{FF50F25F-E4D6-4E35-95FE-6BC172648AFB}" type="presParOf" srcId="{DEE2D638-0CC6-4C68-8664-2914F0C5F018}" destId="{D3C2DA39-90B5-4714-A521-BDE75D520EA7}" srcOrd="1" destOrd="0" presId="urn:microsoft.com/office/officeart/2009/3/layout/PieProcess"/>
@@ -1529,730 +1548,6 @@
       <dsp:cNvGrpSpPr/>
     </dsp:nvGrpSpPr>
     <dsp:grpSpPr/>
-    <dsp:sp modelId="{6EE121A7-30C2-4993-9520-69D196B0F348}">
-      <dsp:nvSpPr>
-        <dsp:cNvPr id="0" name=""/>
-        <dsp:cNvSpPr/>
-      </dsp:nvSpPr>
-      <dsp:spPr>
-        <a:xfrm>
-          <a:off x="1364" y="478399"/>
-          <a:ext cx="1106626" cy="1106626"/>
-        </a:xfrm>
-        <a:prstGeom prst="chord">
-          <a:avLst>
-            <a:gd name="adj1" fmla="val 4800000"/>
-            <a:gd name="adj2" fmla="val 16800000"/>
-          </a:avLst>
-        </a:prstGeom>
-        <a:solidFill>
-          <a:schemeClr val="accent5">
-            <a:tint val="40000"/>
-            <a:hueOff val="0"/>
-            <a:satOff val="0"/>
-            <a:lumOff val="0"/>
-            <a:alphaOff val="0"/>
-          </a:schemeClr>
-        </a:solidFill>
-        <a:ln>
-          <a:noFill/>
-        </a:ln>
-        <a:effectLst/>
-      </dsp:spPr>
-      <dsp:style>
-        <a:lnRef idx="0">
-          <a:scrgbClr r="0" g="0" b="0"/>
-        </a:lnRef>
-        <a:fillRef idx="1">
-          <a:scrgbClr r="0" g="0" b="0"/>
-        </a:fillRef>
-        <a:effectRef idx="0">
-          <a:scrgbClr r="0" g="0" b="0"/>
-        </a:effectRef>
-        <a:fontRef idx="minor"/>
-      </dsp:style>
-    </dsp:sp>
-    <dsp:sp modelId="{D3C2DA39-90B5-4714-A521-BDE75D520EA7}">
-      <dsp:nvSpPr>
-        <dsp:cNvPr id="0" name=""/>
-        <dsp:cNvSpPr/>
-      </dsp:nvSpPr>
-      <dsp:spPr>
-        <a:xfrm>
-          <a:off x="112027" y="589061"/>
-          <a:ext cx="885301" cy="885301"/>
-        </a:xfrm>
-        <a:prstGeom prst="pie">
-          <a:avLst>
-            <a:gd name="adj1" fmla="val 12600000"/>
-            <a:gd name="adj2" fmla="val 16200000"/>
-          </a:avLst>
-        </a:prstGeom>
-        <a:solidFill>
-          <a:schemeClr val="accent5">
-            <a:hueOff val="0"/>
-            <a:satOff val="0"/>
-            <a:lumOff val="0"/>
-            <a:alphaOff val="0"/>
-          </a:schemeClr>
-        </a:solidFill>
-        <a:ln w="12700" cap="flat" cmpd="sng" algn="ctr">
-          <a:solidFill>
-            <a:schemeClr val="accent5">
-              <a:hueOff val="0"/>
-              <a:satOff val="0"/>
-              <a:lumOff val="0"/>
-              <a:alphaOff val="0"/>
-            </a:schemeClr>
-          </a:solidFill>
-          <a:prstDash val="solid"/>
-          <a:miter lim="800000"/>
-        </a:ln>
-        <a:effectLst/>
-      </dsp:spPr>
-      <dsp:style>
-        <a:lnRef idx="2">
-          <a:scrgbClr r="0" g="0" b="0"/>
-        </a:lnRef>
-        <a:fillRef idx="1">
-          <a:scrgbClr r="0" g="0" b="0"/>
-        </a:fillRef>
-        <a:effectRef idx="0">
-          <a:scrgbClr r="0" g="0" b="0"/>
-        </a:effectRef>
-        <a:fontRef idx="minor">
-          <a:schemeClr val="lt1"/>
-        </a:fontRef>
-      </dsp:style>
-    </dsp:sp>
-    <dsp:sp modelId="{382450F0-2E25-4A86-B3A0-3FD2B8F1F567}">
-      <dsp:nvSpPr>
-        <dsp:cNvPr id="0" name=""/>
-        <dsp:cNvSpPr/>
-      </dsp:nvSpPr>
-      <dsp:spPr>
-        <a:xfrm rot="16200000">
-          <a:off x="-1271255" y="2968308"/>
-          <a:ext cx="3209216" cy="663975"/>
-        </a:xfrm>
-        <a:prstGeom prst="rect">
-          <a:avLst/>
-        </a:prstGeom>
-        <a:noFill/>
-        <a:ln>
-          <a:noFill/>
-        </a:ln>
-        <a:effectLst/>
-      </dsp:spPr>
-      <dsp:style>
-        <a:lnRef idx="0">
-          <a:scrgbClr r="0" g="0" b="0"/>
-        </a:lnRef>
-        <a:fillRef idx="0">
-          <a:scrgbClr r="0" g="0" b="0"/>
-        </a:fillRef>
-        <a:effectRef idx="0">
-          <a:scrgbClr r="0" g="0" b="0"/>
-        </a:effectRef>
-        <a:fontRef idx="minor"/>
-      </dsp:style>
-      <dsp:txBody>
-        <a:bodyPr spcFirstLastPara="0" vert="horz" wrap="square" lIns="0" tIns="0" rIns="0" bIns="0" numCol="1" spcCol="1270" anchor="b" anchorCtr="0">
-          <a:noAutofit/>
-        </a:bodyPr>
-        <a:lstStyle/>
-        <a:p>
-          <a:pPr lvl="0" algn="r" defTabSz="1022350">
-            <a:lnSpc>
-              <a:spcPct val="90000"/>
-            </a:lnSpc>
-            <a:spcBef>
-              <a:spcPct val="0"/>
-            </a:spcBef>
-            <a:spcAft>
-              <a:spcPct val="35000"/>
-            </a:spcAft>
-          </a:pPr>
-          <a:r>
-            <a:rPr lang="en-US" sz="2300" kern="1200" dirty="0" smtClean="0"/>
-            <a:t>Checking Missing Values</a:t>
-          </a:r>
-          <a:endParaRPr lang="en-US" sz="2300" kern="1200" dirty="0"/>
-        </a:p>
-      </dsp:txBody>
-      <dsp:txXfrm>
-        <a:off x="-1271255" y="2968308"/>
-        <a:ext cx="3209216" cy="663975"/>
-      </dsp:txXfrm>
-    </dsp:sp>
-    <dsp:sp modelId="{B7690194-DAEB-4E5B-AB7C-DB67A7ED3818}">
-      <dsp:nvSpPr>
-        <dsp:cNvPr id="0" name=""/>
-        <dsp:cNvSpPr/>
-      </dsp:nvSpPr>
-      <dsp:spPr>
-        <a:xfrm>
-          <a:off x="776003" y="478399"/>
-          <a:ext cx="3027486" cy="4426505"/>
-        </a:xfrm>
-        <a:prstGeom prst="rect">
-          <a:avLst/>
-        </a:prstGeom>
-        <a:noFill/>
-        <a:ln>
-          <a:noFill/>
-        </a:ln>
-        <a:effectLst/>
-      </dsp:spPr>
-      <dsp:style>
-        <a:lnRef idx="0">
-          <a:scrgbClr r="0" g="0" b="0"/>
-        </a:lnRef>
-        <a:fillRef idx="0">
-          <a:scrgbClr r="0" g="0" b="0"/>
-        </a:fillRef>
-        <a:effectRef idx="0">
-          <a:scrgbClr r="0" g="0" b="0"/>
-        </a:effectRef>
-        <a:fontRef idx="minor"/>
-      </dsp:style>
-      <dsp:txBody>
-        <a:bodyPr spcFirstLastPara="0" vert="horz" wrap="square" lIns="0" tIns="0" rIns="0" bIns="0" numCol="1" spcCol="1270" anchor="t" anchorCtr="0">
-          <a:noAutofit/>
-        </a:bodyPr>
-        <a:lstStyle/>
-        <a:p>
-          <a:pPr lvl="0" algn="l" defTabSz="711200">
-            <a:lnSpc>
-              <a:spcPct val="150000"/>
-            </a:lnSpc>
-            <a:spcBef>
-              <a:spcPct val="0"/>
-            </a:spcBef>
-            <a:spcAft>
-              <a:spcPts val="0"/>
-            </a:spcAft>
-          </a:pPr>
-          <a:r>
-            <a:rPr lang="en-US" sz="1600" kern="1200" dirty="0" smtClean="0">
-              <a:latin typeface="Tahoma" panose="020B0604030504040204" pitchFamily="34" charset="0"/>
-              <a:ea typeface="Tahoma" panose="020B0604030504040204" pitchFamily="34" charset="0"/>
-              <a:cs typeface="Tahoma" panose="020B0604030504040204" pitchFamily="34" charset="0"/>
-            </a:rPr>
-            <a:t>No Missing Values in the Games Dataset</a:t>
-          </a:r>
-          <a:endParaRPr lang="en-US" sz="1600" kern="1200" dirty="0">
-            <a:latin typeface="Tahoma" panose="020B0604030504040204" pitchFamily="34" charset="0"/>
-            <a:ea typeface="Tahoma" panose="020B0604030504040204" pitchFamily="34" charset="0"/>
-            <a:cs typeface="Tahoma" panose="020B0604030504040204" pitchFamily="34" charset="0"/>
-          </a:endParaRPr>
-        </a:p>
-      </dsp:txBody>
-      <dsp:txXfrm>
-        <a:off x="776003" y="478399"/>
-        <a:ext cx="3027486" cy="4426505"/>
-      </dsp:txXfrm>
-    </dsp:sp>
-    <dsp:sp modelId="{30EAA591-B7CD-4A8B-BD22-626870803BC0}">
-      <dsp:nvSpPr>
-        <dsp:cNvPr id="0" name=""/>
-        <dsp:cNvSpPr/>
-      </dsp:nvSpPr>
-      <dsp:spPr>
-        <a:xfrm>
-          <a:off x="4075170" y="460980"/>
-          <a:ext cx="1106626" cy="1106626"/>
-        </a:xfrm>
-        <a:prstGeom prst="chord">
-          <a:avLst>
-            <a:gd name="adj1" fmla="val 4800000"/>
-            <a:gd name="adj2" fmla="val 16800000"/>
-          </a:avLst>
-        </a:prstGeom>
-        <a:solidFill>
-          <a:schemeClr val="accent5">
-            <a:tint val="40000"/>
-            <a:hueOff val="0"/>
-            <a:satOff val="0"/>
-            <a:lumOff val="0"/>
-            <a:alphaOff val="0"/>
-          </a:schemeClr>
-        </a:solidFill>
-        <a:ln>
-          <a:noFill/>
-        </a:ln>
-        <a:effectLst/>
-      </dsp:spPr>
-      <dsp:style>
-        <a:lnRef idx="0">
-          <a:scrgbClr r="0" g="0" b="0"/>
-        </a:lnRef>
-        <a:fillRef idx="1">
-          <a:scrgbClr r="0" g="0" b="0"/>
-        </a:fillRef>
-        <a:effectRef idx="0">
-          <a:scrgbClr r="0" g="0" b="0"/>
-        </a:effectRef>
-        <a:fontRef idx="minor"/>
-      </dsp:style>
-    </dsp:sp>
-    <dsp:sp modelId="{F568569A-B650-407A-BCB5-DE1BA238882C}">
-      <dsp:nvSpPr>
-        <dsp:cNvPr id="0" name=""/>
-        <dsp:cNvSpPr/>
-      </dsp:nvSpPr>
-      <dsp:spPr>
-        <a:xfrm>
-          <a:off x="3758996" y="589061"/>
-          <a:ext cx="885301" cy="885301"/>
-        </a:xfrm>
-        <a:prstGeom prst="pie">
-          <a:avLst>
-            <a:gd name="adj1" fmla="val 9000000"/>
-            <a:gd name="adj2" fmla="val 16200000"/>
-          </a:avLst>
-        </a:prstGeom>
-        <a:solidFill>
-          <a:schemeClr val="accent5">
-            <a:hueOff val="-3676672"/>
-            <a:satOff val="-5114"/>
-            <a:lumOff val="-1961"/>
-            <a:alphaOff val="0"/>
-          </a:schemeClr>
-        </a:solidFill>
-        <a:ln w="12700" cap="flat" cmpd="sng" algn="ctr">
-          <a:solidFill>
-            <a:schemeClr val="accent5">
-              <a:hueOff val="-3676672"/>
-              <a:satOff val="-5114"/>
-              <a:lumOff val="-1961"/>
-              <a:alphaOff val="0"/>
-            </a:schemeClr>
-          </a:solidFill>
-          <a:prstDash val="solid"/>
-          <a:miter lim="800000"/>
-        </a:ln>
-        <a:effectLst/>
-      </dsp:spPr>
-      <dsp:style>
-        <a:lnRef idx="2">
-          <a:scrgbClr r="0" g="0" b="0"/>
-        </a:lnRef>
-        <a:fillRef idx="1">
-          <a:scrgbClr r="0" g="0" b="0"/>
-        </a:fillRef>
-        <a:effectRef idx="0">
-          <a:scrgbClr r="0" g="0" b="0"/>
-        </a:effectRef>
-        <a:fontRef idx="minor">
-          <a:schemeClr val="lt1"/>
-        </a:fontRef>
-      </dsp:style>
-    </dsp:sp>
-    <dsp:sp modelId="{821D1612-9A0C-4470-8060-04AC6DFEA511}">
-      <dsp:nvSpPr>
-        <dsp:cNvPr id="0" name=""/>
-        <dsp:cNvSpPr/>
-      </dsp:nvSpPr>
-      <dsp:spPr>
-        <a:xfrm rot="16200000">
-          <a:off x="2436681" y="2968308"/>
-          <a:ext cx="3209216" cy="663975"/>
-        </a:xfrm>
-        <a:prstGeom prst="rect">
-          <a:avLst/>
-        </a:prstGeom>
-        <a:noFill/>
-        <a:ln>
-          <a:noFill/>
-        </a:ln>
-        <a:effectLst/>
-      </dsp:spPr>
-      <dsp:style>
-        <a:lnRef idx="0">
-          <a:scrgbClr r="0" g="0" b="0"/>
-        </a:lnRef>
-        <a:fillRef idx="0">
-          <a:scrgbClr r="0" g="0" b="0"/>
-        </a:fillRef>
-        <a:effectRef idx="0">
-          <a:scrgbClr r="0" g="0" b="0"/>
-        </a:effectRef>
-        <a:fontRef idx="minor"/>
-      </dsp:style>
-      <dsp:txBody>
-        <a:bodyPr spcFirstLastPara="0" vert="horz" wrap="square" lIns="0" tIns="0" rIns="0" bIns="0" numCol="1" spcCol="1270" anchor="b" anchorCtr="0">
-          <a:noAutofit/>
-        </a:bodyPr>
-        <a:lstStyle/>
-        <a:p>
-          <a:pPr lvl="0" algn="r" defTabSz="1022350">
-            <a:lnSpc>
-              <a:spcPct val="90000"/>
-            </a:lnSpc>
-            <a:spcBef>
-              <a:spcPct val="0"/>
-            </a:spcBef>
-            <a:spcAft>
-              <a:spcPct val="35000"/>
-            </a:spcAft>
-          </a:pPr>
-          <a:r>
-            <a:rPr lang="en-US" sz="2300" kern="1200" dirty="0" smtClean="0"/>
-            <a:t>Checking Duplicates </a:t>
-          </a:r>
-          <a:endParaRPr lang="en-US" sz="2300" kern="1200" dirty="0"/>
-        </a:p>
-      </dsp:txBody>
-      <dsp:txXfrm>
-        <a:off x="2436681" y="2968308"/>
-        <a:ext cx="3209216" cy="663975"/>
-      </dsp:txXfrm>
-    </dsp:sp>
-    <dsp:sp modelId="{9E76B566-1070-40F7-95F6-38CFF576C21E}">
-      <dsp:nvSpPr>
-        <dsp:cNvPr id="0" name=""/>
-        <dsp:cNvSpPr/>
-      </dsp:nvSpPr>
-      <dsp:spPr>
-        <a:xfrm>
-          <a:off x="4885077" y="530631"/>
-          <a:ext cx="2213252" cy="4426505"/>
-        </a:xfrm>
-        <a:prstGeom prst="rect">
-          <a:avLst/>
-        </a:prstGeom>
-        <a:noFill/>
-        <a:ln>
-          <a:noFill/>
-        </a:ln>
-        <a:effectLst/>
-      </dsp:spPr>
-      <dsp:style>
-        <a:lnRef idx="0">
-          <a:scrgbClr r="0" g="0" b="0"/>
-        </a:lnRef>
-        <a:fillRef idx="0">
-          <a:scrgbClr r="0" g="0" b="0"/>
-        </a:fillRef>
-        <a:effectRef idx="0">
-          <a:scrgbClr r="0" g="0" b="0"/>
-        </a:effectRef>
-        <a:fontRef idx="minor"/>
-      </dsp:style>
-      <dsp:txBody>
-        <a:bodyPr spcFirstLastPara="0" vert="horz" wrap="square" lIns="0" tIns="0" rIns="0" bIns="0" numCol="1" spcCol="1270" anchor="t" anchorCtr="0">
-          <a:noAutofit/>
-        </a:bodyPr>
-        <a:lstStyle/>
-        <a:p>
-          <a:pPr lvl="0" algn="l" defTabSz="711200">
-            <a:lnSpc>
-              <a:spcPct val="150000"/>
-            </a:lnSpc>
-            <a:spcBef>
-              <a:spcPct val="0"/>
-            </a:spcBef>
-            <a:spcAft>
-              <a:spcPts val="0"/>
-            </a:spcAft>
-          </a:pPr>
-          <a:r>
-            <a:rPr lang="en-US" sz="1600" kern="1200" dirty="0" smtClean="0">
-              <a:latin typeface="Tahoma" panose="020B0604030504040204" pitchFamily="34" charset="0"/>
-              <a:ea typeface="Tahoma" panose="020B0604030504040204" pitchFamily="34" charset="0"/>
-              <a:cs typeface="Tahoma" panose="020B0604030504040204" pitchFamily="34" charset="0"/>
-            </a:rPr>
-            <a:t>No Duplicates were found in the Games Dataset</a:t>
-          </a:r>
-          <a:endParaRPr lang="en-US" sz="1600" kern="1200" dirty="0">
-            <a:latin typeface="Tahoma" panose="020B0604030504040204" pitchFamily="34" charset="0"/>
-            <a:ea typeface="Tahoma" panose="020B0604030504040204" pitchFamily="34" charset="0"/>
-            <a:cs typeface="Tahoma" panose="020B0604030504040204" pitchFamily="34" charset="0"/>
-          </a:endParaRPr>
-        </a:p>
-      </dsp:txBody>
-      <dsp:txXfrm>
-        <a:off x="4885077" y="530631"/>
-        <a:ext cx="2213252" cy="4426505"/>
-      </dsp:txXfrm>
-    </dsp:sp>
-    <dsp:sp modelId="{51A5445F-4E32-471F-849F-F50444087DA5}">
-      <dsp:nvSpPr>
-        <dsp:cNvPr id="0" name=""/>
-        <dsp:cNvSpPr/>
-      </dsp:nvSpPr>
-      <dsp:spPr>
-        <a:xfrm>
-          <a:off x="7447961" y="478399"/>
-          <a:ext cx="1106626" cy="1106626"/>
-        </a:xfrm>
-        <a:prstGeom prst="chord">
-          <a:avLst>
-            <a:gd name="adj1" fmla="val 4800000"/>
-            <a:gd name="adj2" fmla="val 16800000"/>
-          </a:avLst>
-        </a:prstGeom>
-        <a:solidFill>
-          <a:schemeClr val="accent5">
-            <a:tint val="40000"/>
-            <a:hueOff val="0"/>
-            <a:satOff val="0"/>
-            <a:lumOff val="0"/>
-            <a:alphaOff val="0"/>
-          </a:schemeClr>
-        </a:solidFill>
-        <a:ln>
-          <a:noFill/>
-        </a:ln>
-        <a:effectLst/>
-      </dsp:spPr>
-      <dsp:style>
-        <a:lnRef idx="0">
-          <a:scrgbClr r="0" g="0" b="0"/>
-        </a:lnRef>
-        <a:fillRef idx="1">
-          <a:scrgbClr r="0" g="0" b="0"/>
-        </a:fillRef>
-        <a:effectRef idx="0">
-          <a:scrgbClr r="0" g="0" b="0"/>
-        </a:effectRef>
-        <a:fontRef idx="minor"/>
-      </dsp:style>
-    </dsp:sp>
-    <dsp:sp modelId="{A93232D6-090A-4D2A-A6A6-76A003C87711}">
-      <dsp:nvSpPr>
-        <dsp:cNvPr id="0" name=""/>
-        <dsp:cNvSpPr/>
-      </dsp:nvSpPr>
-      <dsp:spPr>
-        <a:xfrm>
-          <a:off x="7558329" y="548399"/>
-          <a:ext cx="885301" cy="885301"/>
-        </a:xfrm>
-        <a:prstGeom prst="pie">
-          <a:avLst>
-            <a:gd name="adj1" fmla="val 5400000"/>
-            <a:gd name="adj2" fmla="val 16200000"/>
-          </a:avLst>
-        </a:prstGeom>
-        <a:solidFill>
-          <a:schemeClr val="accent5">
-            <a:hueOff val="-7353344"/>
-            <a:satOff val="-10228"/>
-            <a:lumOff val="-3922"/>
-            <a:alphaOff val="0"/>
-          </a:schemeClr>
-        </a:solidFill>
-        <a:ln w="12700" cap="flat" cmpd="sng" algn="ctr">
-          <a:solidFill>
-            <a:schemeClr val="accent5">
-              <a:hueOff val="-7353344"/>
-              <a:satOff val="-10228"/>
-              <a:lumOff val="-3922"/>
-              <a:alphaOff val="0"/>
-            </a:schemeClr>
-          </a:solidFill>
-          <a:prstDash val="solid"/>
-          <a:miter lim="800000"/>
-        </a:ln>
-        <a:effectLst/>
-      </dsp:spPr>
-      <dsp:style>
-        <a:lnRef idx="2">
-          <a:scrgbClr r="0" g="0" b="0"/>
-        </a:lnRef>
-        <a:fillRef idx="1">
-          <a:scrgbClr r="0" g="0" b="0"/>
-        </a:fillRef>
-        <a:effectRef idx="0">
-          <a:scrgbClr r="0" g="0" b="0"/>
-        </a:effectRef>
-        <a:fontRef idx="minor">
-          <a:schemeClr val="lt1"/>
-        </a:fontRef>
-      </dsp:style>
-    </dsp:sp>
-    <dsp:sp modelId="{AD0AB4B1-9B1B-4DF2-A437-8F568DA3FCC8}">
-      <dsp:nvSpPr>
-        <dsp:cNvPr id="0" name=""/>
-        <dsp:cNvSpPr/>
-      </dsp:nvSpPr>
-      <dsp:spPr>
-        <a:xfrm rot="16200000">
-          <a:off x="6223286" y="2924310"/>
-          <a:ext cx="3209216" cy="663975"/>
-        </a:xfrm>
-        <a:prstGeom prst="rect">
-          <a:avLst/>
-        </a:prstGeom>
-        <a:noFill/>
-        <a:ln>
-          <a:noFill/>
-        </a:ln>
-        <a:effectLst/>
-      </dsp:spPr>
-      <dsp:style>
-        <a:lnRef idx="0">
-          <a:scrgbClr r="0" g="0" b="0"/>
-        </a:lnRef>
-        <a:fillRef idx="0">
-          <a:scrgbClr r="0" g="0" b="0"/>
-        </a:fillRef>
-        <a:effectRef idx="0">
-          <a:scrgbClr r="0" g="0" b="0"/>
-        </a:effectRef>
-        <a:fontRef idx="minor"/>
-      </dsp:style>
-      <dsp:txBody>
-        <a:bodyPr spcFirstLastPara="0" vert="horz" wrap="square" lIns="0" tIns="0" rIns="0" bIns="0" numCol="1" spcCol="1270" anchor="b" anchorCtr="0">
-          <a:noAutofit/>
-        </a:bodyPr>
-        <a:lstStyle/>
-        <a:p>
-          <a:pPr lvl="0" algn="r" defTabSz="1022350">
-            <a:lnSpc>
-              <a:spcPct val="90000"/>
-            </a:lnSpc>
-            <a:spcBef>
-              <a:spcPct val="0"/>
-            </a:spcBef>
-            <a:spcAft>
-              <a:spcPct val="35000"/>
-            </a:spcAft>
-          </a:pPr>
-          <a:r>
-            <a:rPr lang="en-US" sz="2300" kern="1200" dirty="0" smtClean="0"/>
-            <a:t>Checking and Transforming Outliers</a:t>
-          </a:r>
-          <a:endParaRPr lang="en-US" sz="2300" kern="1200" dirty="0"/>
-        </a:p>
-      </dsp:txBody>
-      <dsp:txXfrm>
-        <a:off x="6223286" y="2924310"/>
-        <a:ext cx="3209216" cy="663975"/>
-      </dsp:txXfrm>
-    </dsp:sp>
-    <dsp:sp modelId="{A6AC1F14-A500-47A1-BFCF-540BB4584AA2}">
-      <dsp:nvSpPr>
-        <dsp:cNvPr id="0" name=""/>
-        <dsp:cNvSpPr/>
-      </dsp:nvSpPr>
-      <dsp:spPr>
-        <a:xfrm>
-          <a:off x="8213957" y="503364"/>
-          <a:ext cx="2213252" cy="4426505"/>
-        </a:xfrm>
-        <a:prstGeom prst="rect">
-          <a:avLst/>
-        </a:prstGeom>
-        <a:noFill/>
-        <a:ln>
-          <a:noFill/>
-        </a:ln>
-        <a:effectLst/>
-      </dsp:spPr>
-      <dsp:style>
-        <a:lnRef idx="0">
-          <a:scrgbClr r="0" g="0" b="0"/>
-        </a:lnRef>
-        <a:fillRef idx="0">
-          <a:scrgbClr r="0" g="0" b="0"/>
-        </a:fillRef>
-        <a:effectRef idx="0">
-          <a:scrgbClr r="0" g="0" b="0"/>
-        </a:effectRef>
-        <a:fontRef idx="minor"/>
-      </dsp:style>
-      <dsp:txBody>
-        <a:bodyPr spcFirstLastPara="0" vert="horz" wrap="square" lIns="0" tIns="0" rIns="0" bIns="0" numCol="1" spcCol="1270" anchor="t" anchorCtr="0">
-          <a:noAutofit/>
-        </a:bodyPr>
-        <a:lstStyle/>
-        <a:p>
-          <a:pPr lvl="0" algn="l" defTabSz="711200">
-            <a:lnSpc>
-              <a:spcPct val="150000"/>
-            </a:lnSpc>
-            <a:spcBef>
-              <a:spcPct val="0"/>
-            </a:spcBef>
-            <a:spcAft>
-              <a:spcPts val="0"/>
-            </a:spcAft>
-          </a:pPr>
-          <a:r>
-            <a:rPr lang="en-US" sz="1600" kern="1200" dirty="0" smtClean="0">
-              <a:latin typeface="Tahoma" panose="020B0604030504040204" pitchFamily="34" charset="0"/>
-              <a:ea typeface="Tahoma" panose="020B0604030504040204" pitchFamily="34" charset="0"/>
-              <a:cs typeface="Tahoma" panose="020B0604030504040204" pitchFamily="34" charset="0"/>
-            </a:rPr>
-            <a:t>Multiple Outliers found in the Games Dataset.</a:t>
-          </a:r>
-          <a:endParaRPr lang="en-US" sz="1600" kern="1200" dirty="0">
-            <a:latin typeface="Tahoma" panose="020B0604030504040204" pitchFamily="34" charset="0"/>
-            <a:ea typeface="Tahoma" panose="020B0604030504040204" pitchFamily="34" charset="0"/>
-            <a:cs typeface="Tahoma" panose="020B0604030504040204" pitchFamily="34" charset="0"/>
-          </a:endParaRPr>
-        </a:p>
-        <a:p>
-          <a:pPr lvl="0" algn="l" defTabSz="711200">
-            <a:lnSpc>
-              <a:spcPct val="150000"/>
-            </a:lnSpc>
-            <a:spcBef>
-              <a:spcPct val="0"/>
-            </a:spcBef>
-            <a:spcAft>
-              <a:spcPts val="0"/>
-            </a:spcAft>
-          </a:pPr>
-          <a:r>
-            <a:rPr lang="en-US" sz="1600" kern="1200" dirty="0" smtClean="0">
-              <a:latin typeface="Tahoma" panose="020B0604030504040204" pitchFamily="34" charset="0"/>
-              <a:ea typeface="Tahoma" panose="020B0604030504040204" pitchFamily="34" charset="0"/>
-              <a:cs typeface="Tahoma" panose="020B0604030504040204" pitchFamily="34" charset="0"/>
-            </a:rPr>
-            <a:t>All Outliers were Right Skewed.</a:t>
-          </a:r>
-          <a:endParaRPr lang="en-US" sz="1600" kern="1200" dirty="0">
-            <a:latin typeface="Tahoma" panose="020B0604030504040204" pitchFamily="34" charset="0"/>
-            <a:ea typeface="Tahoma" panose="020B0604030504040204" pitchFamily="34" charset="0"/>
-            <a:cs typeface="Tahoma" panose="020B0604030504040204" pitchFamily="34" charset="0"/>
-          </a:endParaRPr>
-        </a:p>
-        <a:p>
-          <a:pPr lvl="0" algn="l" defTabSz="711200">
-            <a:lnSpc>
-              <a:spcPct val="150000"/>
-            </a:lnSpc>
-            <a:spcBef>
-              <a:spcPct val="0"/>
-            </a:spcBef>
-            <a:spcAft>
-              <a:spcPts val="0"/>
-            </a:spcAft>
-          </a:pPr>
-          <a:r>
-            <a:rPr lang="en-US" sz="1600" kern="1200" dirty="0" smtClean="0">
-              <a:latin typeface="Tahoma" panose="020B0604030504040204" pitchFamily="34" charset="0"/>
-              <a:ea typeface="Tahoma" panose="020B0604030504040204" pitchFamily="34" charset="0"/>
-              <a:cs typeface="Tahoma" panose="020B0604030504040204" pitchFamily="34" charset="0"/>
-            </a:rPr>
-            <a:t>Instead of Deletion. Apply Log Transformation and Capping.</a:t>
-          </a:r>
-          <a:endParaRPr lang="en-US" sz="1600" kern="1200" dirty="0">
-            <a:latin typeface="Tahoma" panose="020B0604030504040204" pitchFamily="34" charset="0"/>
-            <a:ea typeface="Tahoma" panose="020B0604030504040204" pitchFamily="34" charset="0"/>
-            <a:cs typeface="Tahoma" panose="020B0604030504040204" pitchFamily="34" charset="0"/>
-          </a:endParaRPr>
-        </a:p>
-      </dsp:txBody>
-      <dsp:txXfrm>
-        <a:off x="8213957" y="503364"/>
-        <a:ext cx="2213252" cy="4426505"/>
-      </dsp:txXfrm>
-    </dsp:sp>
   </dsp:spTree>
 </dsp:drawing>
 </file>
@@ -9096,7 +8391,7 @@
               </a:tabLst>
             </a:pPr>
             <a:r>
-              <a:rPr lang="en-US" sz="3800" b="1" dirty="0">
+              <a:rPr lang="en-US" sz="3600" b="1" dirty="0">
                 <a:solidFill>
                   <a:srgbClr val="002060"/>
                 </a:solidFill>
@@ -9106,7 +8401,7 @@
               </a:rPr>
               <a:t>A MULTI-SOURCE VIDEO GAME POPULARITY ANALYSIS USING STEAM PLAYER DATA AND GOOGLE TRENDS</a:t>
             </a:r>
-            <a:endParaRPr lang="fr-FR" sz="3800" b="1" dirty="0">
+            <a:endParaRPr lang="fr-FR" sz="3600" b="1" dirty="0">
               <a:solidFill>
                 <a:srgbClr val="002060"/>
               </a:solidFill>
@@ -9206,18 +8501,7 @@
                 <a:uFillTx/>
                 <a:latin typeface="DM Sans"/>
               </a:rPr>
-              <a:t>TAIMOOR </a:t>
-            </a:r>
-            <a:r>
-              <a:rPr lang="en-US" sz="2400" b="1" u="none" strike="noStrike" dirty="0" smtClean="0">
-                <a:solidFill>
-                  <a:schemeClr val="dk1"/>
-                </a:solidFill>
-                <a:effectLst/>
-                <a:uFillTx/>
-                <a:latin typeface="DM Sans"/>
-              </a:rPr>
-              <a:t>AHMAD</a:t>
+              <a:t>TAIMOOR AHMAD</a:t>
             </a:r>
           </a:p>
           <a:p>
@@ -9277,18 +8561,7 @@
                 <a:uFillTx/>
                 <a:latin typeface="DM Sans"/>
               </a:rPr>
-              <a:t>Submitted </a:t>
-            </a:r>
-            <a:r>
-              <a:rPr lang="en-US" sz="2400" b="0" u="none" strike="noStrike" dirty="0" smtClean="0">
-                <a:solidFill>
-                  <a:schemeClr val="dk1"/>
-                </a:solidFill>
-                <a:effectLst/>
-                <a:uFillTx/>
-                <a:latin typeface="DM Sans"/>
-              </a:rPr>
-              <a:t>To: </a:t>
+              <a:t>Submitted To: </a:t>
             </a:r>
             <a:r>
               <a:rPr lang="en-US" sz="2400" b="1" u="none" strike="noStrike" dirty="0" smtClean="0">
@@ -9339,8 +8612,8 @@
           </a:prstGeom>
           <a:ln w="28575">
             <a:solidFill>
-              <a:schemeClr val="tx2">
-                <a:lumMod val="50000"/>
+              <a:schemeClr val="accent1">
+                <a:lumMod val="75000"/>
               </a:schemeClr>
             </a:solidFill>
           </a:ln>
@@ -10510,9 +9783,9 @@
           <p:nvPr/>
         </p:nvSpPr>
         <p:spPr>
-          <a:xfrm>
-            <a:off x="213044" y="-452929"/>
-            <a:ext cx="1052485" cy="1238864"/>
+          <a:xfrm rot="704743">
+            <a:off x="67182" y="-596748"/>
+            <a:ext cx="1104316" cy="1289358"/>
           </a:xfrm>
           <a:custGeom>
             <a:avLst/>
@@ -10606,9 +9879,9 @@
           <p:nvPr/>
         </p:nvSpPr>
         <p:spPr>
-          <a:xfrm>
-            <a:off x="-339635" y="95987"/>
-            <a:ext cx="1052485" cy="1238864"/>
+          <a:xfrm rot="704743">
+            <a:off x="-485497" y="-47832"/>
+            <a:ext cx="1104316" cy="1289358"/>
           </a:xfrm>
           <a:custGeom>
             <a:avLst/>
@@ -11092,8 +10365,8 @@
           <p:nvPr/>
         </p:nvSpPr>
         <p:spPr>
-          <a:xfrm>
-            <a:off x="0" y="5353551"/>
+          <a:xfrm rot="973027">
+            <a:off x="-13951" y="5325364"/>
             <a:ext cx="1052485" cy="1238864"/>
           </a:xfrm>
           <a:custGeom>
@@ -11188,8 +10461,8 @@
           <p:nvPr/>
         </p:nvSpPr>
         <p:spPr>
-          <a:xfrm>
-            <a:off x="-526468" y="5957773"/>
+          <a:xfrm rot="973027">
+            <a:off x="-540419" y="5929586"/>
             <a:ext cx="1052485" cy="1238864"/>
           </a:xfrm>
           <a:custGeom>
@@ -12253,6 +11526,13 @@
   <p:clrMapOvr>
     <a:masterClrMapping/>
   </p:clrMapOvr>
+  <p:timing>
+    <p:tnLst>
+      <p:par>
+        <p:cTn id="1" dur="indefinite" restart="never" nodeType="tmRoot"/>
+      </p:par>
+    </p:tnLst>
+  </p:timing>
 </p:sld>
 </file>
 
@@ -13139,6 +12419,13 @@
   <p:clrMapOvr>
     <a:masterClrMapping/>
   </p:clrMapOvr>
+  <p:timing>
+    <p:tnLst>
+      <p:par>
+        <p:cTn id="1" dur="indefinite" restart="never" nodeType="tmRoot"/>
+      </p:par>
+    </p:tnLst>
+  </p:timing>
 </p:sld>
 </file>
 
@@ -14024,6 +13311,13 @@
   <p:clrMapOvr>
     <a:masterClrMapping/>
   </p:clrMapOvr>
+  <p:timing>
+    <p:tnLst>
+      <p:par>
+        <p:cTn id="1" dur="indefinite" restart="never" nodeType="tmRoot"/>
+      </p:par>
+    </p:tnLst>
+  </p:timing>
 </p:sld>
 </file>
 
@@ -14046,23 +13340,811 @@
       </p:grpSpPr>
       <p:sp>
         <p:nvSpPr>
-          <p:cNvPr id="2" name="Title 1"/>
-          <p:cNvSpPr>
-            <a:spLocks noGrp="1"/>
-          </p:cNvSpPr>
-          <p:nvPr>
-            <p:ph type="title"/>
-          </p:nvPr>
+          <p:cNvPr id="4" name="Google Shape;356;p36"/>
+          <p:cNvSpPr/>
+          <p:nvPr/>
         </p:nvSpPr>
-        <p:spPr/>
+        <p:spPr>
+          <a:xfrm>
+            <a:off x="213044" y="-452929"/>
+            <a:ext cx="1052485" cy="1238864"/>
+          </a:xfrm>
+          <a:custGeom>
+            <a:avLst/>
+            <a:gdLst>
+              <a:gd name="textAreaLeft" fmla="*/ 0 w 838440"/>
+              <a:gd name="textAreaRight" fmla="*/ 838800 w 838440"/>
+              <a:gd name="textAreaTop" fmla="*/ 0 h 967680"/>
+              <a:gd name="textAreaBottom" fmla="*/ 968040 h 967680"/>
+            </a:gdLst>
+            <a:ahLst/>
+            <a:cxnLst/>
+            <a:rect l="textAreaLeft" t="textAreaTop" r="textAreaRight" b="textAreaBottom"/>
+            <a:pathLst>
+              <a:path w="181539" h="209550">
+                <a:moveTo>
+                  <a:pt x="90694" y="0"/>
+                </a:moveTo>
+                <a:lnTo>
+                  <a:pt x="0" y="52388"/>
+                </a:lnTo>
+                <a:lnTo>
+                  <a:pt x="0" y="157163"/>
+                </a:lnTo>
+                <a:lnTo>
+                  <a:pt x="90694" y="209550"/>
+                </a:lnTo>
+                <a:lnTo>
+                  <a:pt x="181539" y="157163"/>
+                </a:lnTo>
+                <a:lnTo>
+                  <a:pt x="181539" y="52388"/>
+                </a:lnTo>
+                <a:lnTo>
+                  <a:pt x="90694" y="0"/>
+                </a:lnTo>
+                <a:close/>
+              </a:path>
+            </a:pathLst>
+          </a:custGeom>
+          <a:solidFill>
+            <a:schemeClr val="accent1"/>
+          </a:solidFill>
+          <a:ln w="19050">
+            <a:solidFill>
+              <a:srgbClr val="FFFFFF"/>
+            </a:solidFill>
+            <a:round/>
+          </a:ln>
+        </p:spPr>
+        <p:style>
+          <a:lnRef idx="0">
+            <a:scrgbClr r="0" g="0" b="0"/>
+          </a:lnRef>
+          <a:fillRef idx="0">
+            <a:scrgbClr r="0" g="0" b="0"/>
+          </a:fillRef>
+          <a:effectRef idx="0">
+            <a:scrgbClr r="0" g="0" b="0"/>
+          </a:effectRef>
+          <a:fontRef idx="minor"/>
+        </p:style>
+        <p:txBody>
+          <a:bodyPr tIns="91440" bIns="91440" anchor="ctr">
+            <a:noAutofit/>
+          </a:bodyPr>
+          <a:lstStyle/>
+          <a:p>
+            <a:pPr defTabSz="914400">
+              <a:lnSpc>
+                <a:spcPct val="100000"/>
+              </a:lnSpc>
+              <a:tabLst>
+                <a:tab pos="0" algn="l"/>
+              </a:tabLst>
+            </a:pPr>
+            <a:endParaRPr lang="en-US" sz="1800" b="0" u="none" strike="noStrike">
+              <a:solidFill>
+                <a:srgbClr val="000000"/>
+              </a:solidFill>
+              <a:effectLst/>
+              <a:uFillTx/>
+              <a:latin typeface="OpenSymbol"/>
+            </a:endParaRPr>
+          </a:p>
+        </p:txBody>
+      </p:sp>
+      <p:sp>
+        <p:nvSpPr>
+          <p:cNvPr id="5" name="Google Shape;358;p36"/>
+          <p:cNvSpPr/>
+          <p:nvPr/>
+        </p:nvSpPr>
+        <p:spPr>
+          <a:xfrm>
+            <a:off x="-339635" y="95987"/>
+            <a:ext cx="1052485" cy="1238864"/>
+          </a:xfrm>
+          <a:custGeom>
+            <a:avLst/>
+            <a:gdLst>
+              <a:gd name="textAreaLeft" fmla="*/ 0 w 838440"/>
+              <a:gd name="textAreaRight" fmla="*/ 838800 w 838440"/>
+              <a:gd name="textAreaTop" fmla="*/ 0 h 967680"/>
+              <a:gd name="textAreaBottom" fmla="*/ 968040 h 967680"/>
+            </a:gdLst>
+            <a:ahLst/>
+            <a:cxnLst/>
+            <a:rect l="textAreaLeft" t="textAreaTop" r="textAreaRight" b="textAreaBottom"/>
+            <a:pathLst>
+              <a:path w="181539" h="209550">
+                <a:moveTo>
+                  <a:pt x="90694" y="0"/>
+                </a:moveTo>
+                <a:lnTo>
+                  <a:pt x="0" y="52388"/>
+                </a:lnTo>
+                <a:lnTo>
+                  <a:pt x="0" y="157163"/>
+                </a:lnTo>
+                <a:lnTo>
+                  <a:pt x="90694" y="209550"/>
+                </a:lnTo>
+                <a:lnTo>
+                  <a:pt x="181539" y="157163"/>
+                </a:lnTo>
+                <a:lnTo>
+                  <a:pt x="181539" y="52388"/>
+                </a:lnTo>
+                <a:lnTo>
+                  <a:pt x="90694" y="0"/>
+                </a:lnTo>
+                <a:close/>
+              </a:path>
+            </a:pathLst>
+          </a:custGeom>
+          <a:solidFill>
+            <a:srgbClr val="68DAF8">
+              <a:alpha val="34000"/>
+            </a:srgbClr>
+          </a:solidFill>
+          <a:ln w="19050">
+            <a:solidFill>
+              <a:srgbClr val="FFFFFF"/>
+            </a:solidFill>
+            <a:round/>
+          </a:ln>
+        </p:spPr>
+        <p:style>
+          <a:lnRef idx="0">
+            <a:scrgbClr r="0" g="0" b="0"/>
+          </a:lnRef>
+          <a:fillRef idx="0">
+            <a:scrgbClr r="0" g="0" b="0"/>
+          </a:fillRef>
+          <a:effectRef idx="0">
+            <a:scrgbClr r="0" g="0" b="0"/>
+          </a:effectRef>
+          <a:fontRef idx="minor"/>
+        </p:style>
+        <p:txBody>
+          <a:bodyPr tIns="91440" bIns="91440" anchor="ctr">
+            <a:noAutofit/>
+          </a:bodyPr>
+          <a:lstStyle/>
+          <a:p>
+            <a:pPr defTabSz="914400">
+              <a:lnSpc>
+                <a:spcPct val="100000"/>
+              </a:lnSpc>
+              <a:tabLst>
+                <a:tab pos="0" algn="l"/>
+              </a:tabLst>
+            </a:pPr>
+            <a:endParaRPr lang="en-US" sz="1800" b="0" u="none" strike="noStrike">
+              <a:solidFill>
+                <a:srgbClr val="000000"/>
+              </a:solidFill>
+              <a:effectLst/>
+              <a:uFillTx/>
+              <a:latin typeface="OpenSymbol"/>
+            </a:endParaRPr>
+          </a:p>
+        </p:txBody>
+      </p:sp>
+      <p:sp>
+        <p:nvSpPr>
+          <p:cNvPr id="6" name="Google Shape;350;p36"/>
+          <p:cNvSpPr/>
+          <p:nvPr/>
+        </p:nvSpPr>
+        <p:spPr>
+          <a:xfrm>
+            <a:off x="11353800" y="6156857"/>
+            <a:ext cx="1052485" cy="1238864"/>
+          </a:xfrm>
+          <a:custGeom>
+            <a:avLst/>
+            <a:gdLst>
+              <a:gd name="textAreaLeft" fmla="*/ 0 w 838440"/>
+              <a:gd name="textAreaRight" fmla="*/ 838800 w 838440"/>
+              <a:gd name="textAreaTop" fmla="*/ 0 h 967680"/>
+              <a:gd name="textAreaBottom" fmla="*/ 968040 h 967680"/>
+            </a:gdLst>
+            <a:ahLst/>
+            <a:cxnLst/>
+            <a:rect l="textAreaLeft" t="textAreaTop" r="textAreaRight" b="textAreaBottom"/>
+            <a:pathLst>
+              <a:path w="181539" h="209550">
+                <a:moveTo>
+                  <a:pt x="90694" y="0"/>
+                </a:moveTo>
+                <a:lnTo>
+                  <a:pt x="0" y="52388"/>
+                </a:lnTo>
+                <a:lnTo>
+                  <a:pt x="0" y="157163"/>
+                </a:lnTo>
+                <a:lnTo>
+                  <a:pt x="90694" y="209550"/>
+                </a:lnTo>
+                <a:lnTo>
+                  <a:pt x="181539" y="157163"/>
+                </a:lnTo>
+                <a:lnTo>
+                  <a:pt x="181539" y="52388"/>
+                </a:lnTo>
+                <a:lnTo>
+                  <a:pt x="90694" y="0"/>
+                </a:lnTo>
+                <a:close/>
+              </a:path>
+            </a:pathLst>
+          </a:custGeom>
+          <a:solidFill>
+            <a:schemeClr val="dk2"/>
+          </a:solidFill>
+          <a:ln w="19050">
+            <a:solidFill>
+              <a:srgbClr val="FFFFFF"/>
+            </a:solidFill>
+            <a:round/>
+          </a:ln>
+        </p:spPr>
+        <p:style>
+          <a:lnRef idx="0">
+            <a:scrgbClr r="0" g="0" b="0"/>
+          </a:lnRef>
+          <a:fillRef idx="0">
+            <a:scrgbClr r="0" g="0" b="0"/>
+          </a:fillRef>
+          <a:effectRef idx="0">
+            <a:scrgbClr r="0" g="0" b="0"/>
+          </a:effectRef>
+          <a:fontRef idx="minor"/>
+        </p:style>
+        <p:txBody>
+          <a:bodyPr tIns="91440" bIns="91440" anchor="ctr">
+            <a:noAutofit/>
+          </a:bodyPr>
+          <a:lstStyle/>
+          <a:p>
+            <a:pPr defTabSz="914400">
+              <a:lnSpc>
+                <a:spcPct val="100000"/>
+              </a:lnSpc>
+              <a:tabLst>
+                <a:tab pos="0" algn="l"/>
+              </a:tabLst>
+            </a:pPr>
+            <a:endParaRPr lang="en-US" sz="1800" b="0" u="none" strike="noStrike">
+              <a:solidFill>
+                <a:srgbClr val="000000"/>
+              </a:solidFill>
+              <a:effectLst/>
+              <a:uFillTx/>
+              <a:latin typeface="OpenSymbol"/>
+            </a:endParaRPr>
+          </a:p>
+        </p:txBody>
+      </p:sp>
+      <p:sp>
+        <p:nvSpPr>
+          <p:cNvPr id="7" name="Google Shape;357;p36"/>
+          <p:cNvSpPr/>
+          <p:nvPr/>
+        </p:nvSpPr>
+        <p:spPr>
+          <a:xfrm>
+            <a:off x="11869874" y="5552173"/>
+            <a:ext cx="1052485" cy="1238864"/>
+          </a:xfrm>
+          <a:custGeom>
+            <a:avLst/>
+            <a:gdLst>
+              <a:gd name="textAreaLeft" fmla="*/ 0 w 838440"/>
+              <a:gd name="textAreaRight" fmla="*/ 838800 w 838440"/>
+              <a:gd name="textAreaTop" fmla="*/ 0 h 967680"/>
+              <a:gd name="textAreaBottom" fmla="*/ 968040 h 967680"/>
+            </a:gdLst>
+            <a:ahLst/>
+            <a:cxnLst/>
+            <a:rect l="textAreaLeft" t="textAreaTop" r="textAreaRight" b="textAreaBottom"/>
+            <a:pathLst>
+              <a:path w="181539" h="209550">
+                <a:moveTo>
+                  <a:pt x="90694" y="0"/>
+                </a:moveTo>
+                <a:lnTo>
+                  <a:pt x="0" y="52388"/>
+                </a:lnTo>
+                <a:lnTo>
+                  <a:pt x="0" y="157163"/>
+                </a:lnTo>
+                <a:lnTo>
+                  <a:pt x="90694" y="209550"/>
+                </a:lnTo>
+                <a:lnTo>
+                  <a:pt x="181539" y="157163"/>
+                </a:lnTo>
+                <a:lnTo>
+                  <a:pt x="181539" y="52388"/>
+                </a:lnTo>
+                <a:lnTo>
+                  <a:pt x="90694" y="0"/>
+                </a:lnTo>
+                <a:close/>
+              </a:path>
+            </a:pathLst>
+          </a:custGeom>
+          <a:solidFill>
+            <a:srgbClr val="9FCBFD">
+              <a:alpha val="41000"/>
+            </a:srgbClr>
+          </a:solidFill>
+          <a:ln w="19050">
+            <a:solidFill>
+              <a:srgbClr val="FFFFFF"/>
+            </a:solidFill>
+            <a:round/>
+          </a:ln>
+        </p:spPr>
+        <p:style>
+          <a:lnRef idx="0">
+            <a:scrgbClr r="0" g="0" b="0"/>
+          </a:lnRef>
+          <a:fillRef idx="0">
+            <a:scrgbClr r="0" g="0" b="0"/>
+          </a:fillRef>
+          <a:effectRef idx="0">
+            <a:scrgbClr r="0" g="0" b="0"/>
+          </a:effectRef>
+          <a:fontRef idx="minor"/>
+        </p:style>
+        <p:txBody>
+          <a:bodyPr tIns="91440" bIns="91440" anchor="ctr">
+            <a:noAutofit/>
+          </a:bodyPr>
+          <a:lstStyle/>
+          <a:p>
+            <a:pPr defTabSz="914400">
+              <a:lnSpc>
+                <a:spcPct val="100000"/>
+              </a:lnSpc>
+              <a:tabLst>
+                <a:tab pos="0" algn="l"/>
+              </a:tabLst>
+            </a:pPr>
+            <a:endParaRPr lang="en-US" sz="1800" b="0" u="none" strike="noStrike">
+              <a:solidFill>
+                <a:srgbClr val="000000"/>
+              </a:solidFill>
+              <a:effectLst/>
+              <a:uFillTx/>
+              <a:latin typeface="OpenSymbol"/>
+            </a:endParaRPr>
+          </a:p>
+        </p:txBody>
+      </p:sp>
+      <p:sp>
+        <p:nvSpPr>
+          <p:cNvPr id="8" name="Google Shape;349;p36"/>
+          <p:cNvSpPr/>
+          <p:nvPr/>
+        </p:nvSpPr>
+        <p:spPr>
+          <a:xfrm>
+            <a:off x="11684962" y="-78858"/>
+            <a:ext cx="1052485" cy="1238864"/>
+          </a:xfrm>
+          <a:custGeom>
+            <a:avLst/>
+            <a:gdLst>
+              <a:gd name="textAreaLeft" fmla="*/ 0 w 838440"/>
+              <a:gd name="textAreaRight" fmla="*/ 838800 w 838440"/>
+              <a:gd name="textAreaTop" fmla="*/ 0 h 967680"/>
+              <a:gd name="textAreaBottom" fmla="*/ 968040 h 967680"/>
+            </a:gdLst>
+            <a:ahLst/>
+            <a:cxnLst/>
+            <a:rect l="textAreaLeft" t="textAreaTop" r="textAreaRight" b="textAreaBottom"/>
+            <a:pathLst>
+              <a:path w="181539" h="209550">
+                <a:moveTo>
+                  <a:pt x="90694" y="0"/>
+                </a:moveTo>
+                <a:lnTo>
+                  <a:pt x="0" y="52388"/>
+                </a:lnTo>
+                <a:lnTo>
+                  <a:pt x="0" y="157163"/>
+                </a:lnTo>
+                <a:lnTo>
+                  <a:pt x="90694" y="209550"/>
+                </a:lnTo>
+                <a:lnTo>
+                  <a:pt x="181539" y="157163"/>
+                </a:lnTo>
+                <a:lnTo>
+                  <a:pt x="181539" y="52388"/>
+                </a:lnTo>
+                <a:lnTo>
+                  <a:pt x="90694" y="0"/>
+                </a:lnTo>
+                <a:close/>
+              </a:path>
+            </a:pathLst>
+          </a:custGeom>
+          <a:solidFill>
+            <a:schemeClr val="lt2"/>
+          </a:solidFill>
+          <a:ln w="19050">
+            <a:solidFill>
+              <a:srgbClr val="FFFFFF"/>
+            </a:solidFill>
+            <a:round/>
+          </a:ln>
+        </p:spPr>
+        <p:style>
+          <a:lnRef idx="0">
+            <a:scrgbClr r="0" g="0" b="0"/>
+          </a:lnRef>
+          <a:fillRef idx="0">
+            <a:scrgbClr r="0" g="0" b="0"/>
+          </a:fillRef>
+          <a:effectRef idx="0">
+            <a:scrgbClr r="0" g="0" b="0"/>
+          </a:effectRef>
+          <a:fontRef idx="minor"/>
+        </p:style>
+        <p:txBody>
+          <a:bodyPr tIns="91440" bIns="91440" anchor="ctr">
+            <a:noAutofit/>
+          </a:bodyPr>
+          <a:lstStyle/>
+          <a:p>
+            <a:pPr defTabSz="914400">
+              <a:lnSpc>
+                <a:spcPct val="100000"/>
+              </a:lnSpc>
+              <a:tabLst>
+                <a:tab pos="0" algn="l"/>
+              </a:tabLst>
+            </a:pPr>
+            <a:endParaRPr lang="en-US" sz="1800" b="0" u="none" strike="noStrike">
+              <a:solidFill>
+                <a:srgbClr val="000000"/>
+              </a:solidFill>
+              <a:effectLst/>
+              <a:uFillTx/>
+              <a:latin typeface="OpenSymbol"/>
+            </a:endParaRPr>
+          </a:p>
+        </p:txBody>
+      </p:sp>
+      <p:sp>
+        <p:nvSpPr>
+          <p:cNvPr id="9" name="Google Shape;366;p36"/>
+          <p:cNvSpPr/>
+          <p:nvPr/>
+        </p:nvSpPr>
+        <p:spPr>
+          <a:xfrm>
+            <a:off x="11139514" y="-610722"/>
+            <a:ext cx="1052485" cy="1238864"/>
+          </a:xfrm>
+          <a:custGeom>
+            <a:avLst/>
+            <a:gdLst>
+              <a:gd name="textAreaLeft" fmla="*/ 0 w 838440"/>
+              <a:gd name="textAreaRight" fmla="*/ 838800 w 838440"/>
+              <a:gd name="textAreaTop" fmla="*/ 0 h 967680"/>
+              <a:gd name="textAreaBottom" fmla="*/ 968040 h 967680"/>
+            </a:gdLst>
+            <a:ahLst/>
+            <a:cxnLst/>
+            <a:rect l="textAreaLeft" t="textAreaTop" r="textAreaRight" b="textAreaBottom"/>
+            <a:pathLst>
+              <a:path w="181539" h="209550">
+                <a:moveTo>
+                  <a:pt x="90694" y="0"/>
+                </a:moveTo>
+                <a:lnTo>
+                  <a:pt x="0" y="52388"/>
+                </a:lnTo>
+                <a:lnTo>
+                  <a:pt x="0" y="157163"/>
+                </a:lnTo>
+                <a:lnTo>
+                  <a:pt x="90694" y="209550"/>
+                </a:lnTo>
+                <a:lnTo>
+                  <a:pt x="181539" y="157163"/>
+                </a:lnTo>
+                <a:lnTo>
+                  <a:pt x="181539" y="52388"/>
+                </a:lnTo>
+                <a:lnTo>
+                  <a:pt x="90694" y="0"/>
+                </a:lnTo>
+                <a:close/>
+              </a:path>
+            </a:pathLst>
+          </a:custGeom>
+          <a:solidFill>
+            <a:srgbClr val="9FCBFD">
+              <a:alpha val="41000"/>
+            </a:srgbClr>
+          </a:solidFill>
+          <a:ln w="19050">
+            <a:solidFill>
+              <a:srgbClr val="FFFFFF"/>
+            </a:solidFill>
+            <a:round/>
+          </a:ln>
+        </p:spPr>
+        <p:style>
+          <a:lnRef idx="0">
+            <a:scrgbClr r="0" g="0" b="0"/>
+          </a:lnRef>
+          <a:fillRef idx="0">
+            <a:scrgbClr r="0" g="0" b="0"/>
+          </a:fillRef>
+          <a:effectRef idx="0">
+            <a:scrgbClr r="0" g="0" b="0"/>
+          </a:effectRef>
+          <a:fontRef idx="minor"/>
+        </p:style>
+        <p:txBody>
+          <a:bodyPr tIns="91440" bIns="91440" anchor="ctr">
+            <a:noAutofit/>
+          </a:bodyPr>
+          <a:lstStyle/>
+          <a:p>
+            <a:pPr defTabSz="914400">
+              <a:lnSpc>
+                <a:spcPct val="100000"/>
+              </a:lnSpc>
+              <a:tabLst>
+                <a:tab pos="0" algn="l"/>
+              </a:tabLst>
+            </a:pPr>
+            <a:endParaRPr lang="en-US" sz="1800" b="0" u="none" strike="noStrike">
+              <a:solidFill>
+                <a:srgbClr val="000000"/>
+              </a:solidFill>
+              <a:effectLst/>
+              <a:uFillTx/>
+              <a:latin typeface="OpenSymbol"/>
+            </a:endParaRPr>
+          </a:p>
+        </p:txBody>
+      </p:sp>
+      <p:sp>
+        <p:nvSpPr>
+          <p:cNvPr id="10" name="Google Shape;351;p36"/>
+          <p:cNvSpPr/>
+          <p:nvPr/>
+        </p:nvSpPr>
+        <p:spPr>
+          <a:xfrm>
+            <a:off x="0" y="5353551"/>
+            <a:ext cx="1052485" cy="1238864"/>
+          </a:xfrm>
+          <a:custGeom>
+            <a:avLst/>
+            <a:gdLst>
+              <a:gd name="textAreaLeft" fmla="*/ 0 w 838440"/>
+              <a:gd name="textAreaRight" fmla="*/ 838800 w 838440"/>
+              <a:gd name="textAreaTop" fmla="*/ 0 h 967680"/>
+              <a:gd name="textAreaBottom" fmla="*/ 968040 h 967680"/>
+            </a:gdLst>
+            <a:ahLst/>
+            <a:cxnLst/>
+            <a:rect l="textAreaLeft" t="textAreaTop" r="textAreaRight" b="textAreaBottom"/>
+            <a:pathLst>
+              <a:path w="181539" h="209550">
+                <a:moveTo>
+                  <a:pt x="90694" y="0"/>
+                </a:moveTo>
+                <a:lnTo>
+                  <a:pt x="0" y="52388"/>
+                </a:lnTo>
+                <a:lnTo>
+                  <a:pt x="0" y="157163"/>
+                </a:lnTo>
+                <a:lnTo>
+                  <a:pt x="90694" y="209550"/>
+                </a:lnTo>
+                <a:lnTo>
+                  <a:pt x="181539" y="157163"/>
+                </a:lnTo>
+                <a:lnTo>
+                  <a:pt x="181539" y="52388"/>
+                </a:lnTo>
+                <a:lnTo>
+                  <a:pt x="90694" y="0"/>
+                </a:lnTo>
+                <a:close/>
+              </a:path>
+            </a:pathLst>
+          </a:custGeom>
+          <a:solidFill>
+            <a:schemeClr val="lt2"/>
+          </a:solidFill>
+          <a:ln w="19050">
+            <a:solidFill>
+              <a:srgbClr val="FFFFFF"/>
+            </a:solidFill>
+            <a:round/>
+          </a:ln>
+        </p:spPr>
+        <p:style>
+          <a:lnRef idx="0">
+            <a:scrgbClr r="0" g="0" b="0"/>
+          </a:lnRef>
+          <a:fillRef idx="0">
+            <a:scrgbClr r="0" g="0" b="0"/>
+          </a:fillRef>
+          <a:effectRef idx="0">
+            <a:scrgbClr r="0" g="0" b="0"/>
+          </a:effectRef>
+          <a:fontRef idx="minor"/>
+        </p:style>
+        <p:txBody>
+          <a:bodyPr tIns="91440" bIns="91440" anchor="ctr">
+            <a:noAutofit/>
+          </a:bodyPr>
+          <a:lstStyle/>
+          <a:p>
+            <a:pPr defTabSz="914400">
+              <a:lnSpc>
+                <a:spcPct val="100000"/>
+              </a:lnSpc>
+              <a:tabLst>
+                <a:tab pos="0" algn="l"/>
+              </a:tabLst>
+            </a:pPr>
+            <a:endParaRPr lang="en-US" sz="1800" b="0" u="none" strike="noStrike">
+              <a:solidFill>
+                <a:srgbClr val="000000"/>
+              </a:solidFill>
+              <a:effectLst/>
+              <a:uFillTx/>
+              <a:latin typeface="OpenSymbol"/>
+            </a:endParaRPr>
+          </a:p>
+        </p:txBody>
+      </p:sp>
+      <p:sp>
+        <p:nvSpPr>
+          <p:cNvPr id="11" name="Google Shape;352;p36"/>
+          <p:cNvSpPr/>
+          <p:nvPr/>
+        </p:nvSpPr>
+        <p:spPr>
+          <a:xfrm>
+            <a:off x="-526468" y="5957773"/>
+            <a:ext cx="1052485" cy="1238864"/>
+          </a:xfrm>
+          <a:custGeom>
+            <a:avLst/>
+            <a:gdLst>
+              <a:gd name="textAreaLeft" fmla="*/ 0 w 838440"/>
+              <a:gd name="textAreaRight" fmla="*/ 838800 w 838440"/>
+              <a:gd name="textAreaTop" fmla="*/ 0 h 967680"/>
+              <a:gd name="textAreaBottom" fmla="*/ 968040 h 967680"/>
+            </a:gdLst>
+            <a:ahLst/>
+            <a:cxnLst/>
+            <a:rect l="textAreaLeft" t="textAreaTop" r="textAreaRight" b="textAreaBottom"/>
+            <a:pathLst>
+              <a:path w="181539" h="209550">
+                <a:moveTo>
+                  <a:pt x="90694" y="0"/>
+                </a:moveTo>
+                <a:lnTo>
+                  <a:pt x="0" y="52388"/>
+                </a:lnTo>
+                <a:lnTo>
+                  <a:pt x="0" y="157163"/>
+                </a:lnTo>
+                <a:lnTo>
+                  <a:pt x="90694" y="209550"/>
+                </a:lnTo>
+                <a:lnTo>
+                  <a:pt x="181539" y="157163"/>
+                </a:lnTo>
+                <a:lnTo>
+                  <a:pt x="181539" y="52388"/>
+                </a:lnTo>
+                <a:lnTo>
+                  <a:pt x="90694" y="0"/>
+                </a:lnTo>
+                <a:close/>
+              </a:path>
+            </a:pathLst>
+          </a:custGeom>
+          <a:solidFill>
+            <a:srgbClr val="9FCBFD">
+              <a:alpha val="41000"/>
+            </a:srgbClr>
+          </a:solidFill>
+          <a:ln w="19050">
+            <a:solidFill>
+              <a:srgbClr val="FFFFFF"/>
+            </a:solidFill>
+            <a:round/>
+          </a:ln>
+        </p:spPr>
+        <p:style>
+          <a:lnRef idx="0">
+            <a:scrgbClr r="0" g="0" b="0"/>
+          </a:lnRef>
+          <a:fillRef idx="0">
+            <a:scrgbClr r="0" g="0" b="0"/>
+          </a:fillRef>
+          <a:effectRef idx="0">
+            <a:scrgbClr r="0" g="0" b="0"/>
+          </a:effectRef>
+          <a:fontRef idx="minor"/>
+        </p:style>
+        <p:txBody>
+          <a:bodyPr tIns="91440" bIns="91440" anchor="ctr">
+            <a:noAutofit/>
+          </a:bodyPr>
+          <a:lstStyle/>
+          <a:p>
+            <a:pPr defTabSz="914400">
+              <a:lnSpc>
+                <a:spcPct val="100000"/>
+              </a:lnSpc>
+              <a:tabLst>
+                <a:tab pos="0" algn="l"/>
+              </a:tabLst>
+            </a:pPr>
+            <a:endParaRPr lang="en-US" sz="1800" b="0" u="none" strike="noStrike">
+              <a:solidFill>
+                <a:srgbClr val="000000"/>
+              </a:solidFill>
+              <a:effectLst/>
+              <a:uFillTx/>
+              <a:latin typeface="OpenSymbol"/>
+            </a:endParaRPr>
+          </a:p>
+        </p:txBody>
+      </p:sp>
+      <p:sp>
+        <p:nvSpPr>
+          <p:cNvPr id="12" name="Rectangle 11"/>
+          <p:cNvSpPr/>
+          <p:nvPr/>
+        </p:nvSpPr>
+        <p:spPr>
+          <a:xfrm>
+            <a:off x="2976283" y="2321877"/>
+            <a:ext cx="6096000" cy="1107996"/>
+          </a:xfrm>
+          <a:prstGeom prst="rect">
+            <a:avLst/>
+          </a:prstGeom>
+        </p:spPr>
         <p:txBody>
           <a:bodyPr>
-            <a:normAutofit/>
+            <a:spAutoFit/>
           </a:bodyPr>
           <a:lstStyle/>
           <a:p>
+            <a:pPr>
+              <a:lnSpc>
+                <a:spcPct val="100000"/>
+              </a:lnSpc>
+              <a:tabLst>
+                <a:tab pos="0" algn="l"/>
+              </a:tabLst>
+            </a:pPr>
             <a:r>
-              <a:rPr lang="en-US" sz="2800" b="1" dirty="0" smtClean="0">
+              <a:rPr lang="en-US" sz="6600" b="1" dirty="0" smtClean="0">
                 <a:solidFill>
                   <a:srgbClr val="002060"/>
                 </a:solidFill>
@@ -14070,56 +14152,23 @@
                 <a:ea typeface="Tahoma" panose="020B0604030504040204" pitchFamily="34" charset="0"/>
                 <a:cs typeface="Tahoma" panose="020B0604030504040204" pitchFamily="34" charset="0"/>
               </a:rPr>
-              <a:t>A MULTI-SOURCE VIDEO GAME POPULARITY ANALYSIS USING STEAM PLAYER DATA AND GOOGLE TRENDS</a:t>
+              <a:t>THANK YOU!</a:t>
             </a:r>
-            <a:r>
-              <a:rPr lang="fr-FR" sz="2800" b="1" dirty="0" smtClean="0">
-                <a:solidFill>
-                  <a:srgbClr val="002060"/>
-                </a:solidFill>
-                <a:latin typeface="Tahoma" panose="020B0604030504040204" pitchFamily="34" charset="0"/>
-                <a:ea typeface="Tahoma" panose="020B0604030504040204" pitchFamily="34" charset="0"/>
-                <a:cs typeface="Tahoma" panose="020B0604030504040204" pitchFamily="34" charset="0"/>
-              </a:rPr>
-              <a:t/>
-            </a:r>
-            <a:br>
-              <a:rPr lang="fr-FR" sz="2800" b="1" dirty="0" smtClean="0">
-                <a:solidFill>
-                  <a:srgbClr val="002060"/>
-                </a:solidFill>
-                <a:latin typeface="Tahoma" panose="020B0604030504040204" pitchFamily="34" charset="0"/>
-                <a:ea typeface="Tahoma" panose="020B0604030504040204" pitchFamily="34" charset="0"/>
-                <a:cs typeface="Tahoma" panose="020B0604030504040204" pitchFamily="34" charset="0"/>
-              </a:rPr>
-            </a:br>
-            <a:endParaRPr lang="en-US" sz="2800" dirty="0"/>
-          </a:p>
-        </p:txBody>
-      </p:sp>
-      <p:sp>
-        <p:nvSpPr>
-          <p:cNvPr id="3" name="Content Placeholder 2"/>
-          <p:cNvSpPr>
-            <a:spLocks noGrp="1"/>
-          </p:cNvSpPr>
-          <p:nvPr>
-            <p:ph idx="1"/>
-          </p:nvPr>
-        </p:nvSpPr>
-        <p:spPr/>
-        <p:txBody>
-          <a:bodyPr/>
-          <a:lstStyle/>
-          <a:p>
-            <a:endParaRPr lang="en-US" dirty="0"/>
+            <a:endParaRPr lang="fr-FR" sz="6600" b="1" dirty="0">
+              <a:solidFill>
+                <a:srgbClr val="002060"/>
+              </a:solidFill>
+              <a:latin typeface="Tahoma" panose="020B0604030504040204" pitchFamily="34" charset="0"/>
+              <a:ea typeface="Tahoma" panose="020B0604030504040204" pitchFamily="34" charset="0"/>
+              <a:cs typeface="Tahoma" panose="020B0604030504040204" pitchFamily="34" charset="0"/>
+            </a:endParaRPr>
           </a:p>
         </p:txBody>
       </p:sp>
     </p:spTree>
     <p:extLst>
       <p:ext uri="{BB962C8B-B14F-4D97-AF65-F5344CB8AC3E}">
-        <p14:creationId xmlns:p14="http://schemas.microsoft.com/office/powerpoint/2010/main" val="2577362324"/>
+        <p14:creationId xmlns:p14="http://schemas.microsoft.com/office/powerpoint/2010/main" val="3208041685"/>
       </p:ext>
     </p:extLst>
   </p:cSld>
@@ -16176,29 +16225,6 @@
           </a:p>
         </p:txBody>
       </p:sp>
-      <p:pic>
-        <p:nvPicPr>
-          <p:cNvPr id="6" name="Picture 5"/>
-          <p:cNvPicPr>
-            <a:picLocks noChangeAspect="1"/>
-          </p:cNvPicPr>
-          <p:nvPr/>
-        </p:nvPicPr>
-        <p:blipFill rotWithShape="1">
-          <a:blip r:embed="rId3"/>
-          <a:srcRect b="1874"/>
-          <a:stretch/>
-        </p:blipFill>
-        <p:spPr>
-          <a:xfrm>
-            <a:off x="5199016" y="2185501"/>
-            <a:ext cx="6992983" cy="4672500"/>
-          </a:xfrm>
-          <a:prstGeom prst="rect">
-            <a:avLst/>
-          </a:prstGeom>
-        </p:spPr>
-      </p:pic>
       <p:sp>
         <p:nvSpPr>
           <p:cNvPr id="7" name="Google Shape;356;p36"/>
@@ -16295,6 +16321,30 @@
           </a:p>
         </p:txBody>
       </p:sp>
+      <p:pic>
+        <p:nvPicPr>
+          <p:cNvPr id="4" name="Picture 3"/>
+          <p:cNvPicPr>
+            <a:picLocks noChangeAspect="1"/>
+          </p:cNvPicPr>
+          <p:nvPr/>
+        </p:nvPicPr>
+        <p:blipFill>
+          <a:blip r:embed="rId3"/>
+          <a:stretch>
+            <a:fillRect/>
+          </a:stretch>
+        </p:blipFill>
+        <p:spPr>
+          <a:xfrm>
+            <a:off x="5554572" y="2135853"/>
+            <a:ext cx="6656632" cy="4722146"/>
+          </a:xfrm>
+          <a:prstGeom prst="rect">
+            <a:avLst/>
+          </a:prstGeom>
+        </p:spPr>
+      </p:pic>
       <p:sp>
         <p:nvSpPr>
           <p:cNvPr id="8" name="Google Shape;358;p36"/>
@@ -17062,13 +17112,13 @@
         </p:nvSpPr>
         <p:spPr>
           <a:xfrm>
-            <a:off x="838200" y="1346660"/>
-            <a:ext cx="10515600" cy="5511340"/>
+            <a:off x="838200" y="1163770"/>
+            <a:ext cx="10515600" cy="5694229"/>
           </a:xfrm>
         </p:spPr>
         <p:txBody>
           <a:bodyPr>
-            <a:normAutofit/>
+            <a:normAutofit lnSpcReduction="10000"/>
           </a:bodyPr>
           <a:lstStyle/>
           <a:p>
@@ -17137,11 +17187,6 @@
               </a:rPr>
               <a:t>https://store.steampowered.com/api/appdetails?appids=%7Bappid%7D&amp;cc=us</a:t>
             </a:r>
-            <a:endParaRPr lang="en-US" sz="1600" dirty="0" smtClean="0">
-              <a:latin typeface="Tahoma" panose="020B0604030504040204" pitchFamily="34" charset="0"/>
-              <a:ea typeface="Tahoma" panose="020B0604030504040204" pitchFamily="34" charset="0"/>
-              <a:cs typeface="Tahoma" panose="020B0604030504040204" pitchFamily="34" charset="0"/>
-            </a:endParaRPr>
           </a:p>
           <a:p>
             <a:pPr lvl="1">
@@ -17178,11 +17223,6 @@
               </a:rPr>
               <a:t>https://steamcharts.com/</a:t>
             </a:r>
-            <a:endParaRPr lang="en-US" sz="1600" dirty="0" smtClean="0">
-              <a:latin typeface="Tahoma" panose="020B0604030504040204" pitchFamily="34" charset="0"/>
-              <a:ea typeface="Tahoma" panose="020B0604030504040204" pitchFamily="34" charset="0"/>
-              <a:cs typeface="Tahoma" panose="020B0604030504040204" pitchFamily="34" charset="0"/>
-            </a:endParaRPr>
           </a:p>
           <a:p>
             <a:pPr lvl="1">
@@ -17493,7 +17533,7 @@
             </a:r>
           </a:p>
           <a:p>
-            <a:pPr lvl="1">
+            <a:pPr marL="228600" lvl="1">
               <a:lnSpc>
                 <a:spcPct val="150000"/>
               </a:lnSpc>
@@ -17501,7 +17541,69 @@
                 <a:spcPts val="0"/>
               </a:spcBef>
             </a:pPr>
-            <a:endParaRPr lang="en-US" sz="1600" dirty="0">
+            <a:r>
+              <a:rPr lang="en-US" sz="1600" dirty="0">
+                <a:latin typeface="Tahoma" panose="020B0604030504040204" pitchFamily="34" charset="0"/>
+                <a:ea typeface="Tahoma" panose="020B0604030504040204" pitchFamily="34" charset="0"/>
+                <a:cs typeface="Tahoma" panose="020B0604030504040204" pitchFamily="34" charset="0"/>
+              </a:rPr>
+              <a:t>Ethical Consideration of </a:t>
+            </a:r>
+            <a:r>
+              <a:rPr lang="en-US" sz="1600" dirty="0" smtClean="0">
+                <a:latin typeface="Tahoma" panose="020B0604030504040204" pitchFamily="34" charset="0"/>
+                <a:ea typeface="Tahoma" panose="020B0604030504040204" pitchFamily="34" charset="0"/>
+                <a:cs typeface="Tahoma" panose="020B0604030504040204" pitchFamily="34" charset="0"/>
+              </a:rPr>
+              <a:t>data</a:t>
+            </a:r>
+          </a:p>
+          <a:p>
+            <a:pPr marL="1143000" lvl="3">
+              <a:lnSpc>
+                <a:spcPct val="160000"/>
+              </a:lnSpc>
+              <a:spcBef>
+                <a:spcPts val="0"/>
+              </a:spcBef>
+            </a:pPr>
+            <a:r>
+              <a:rPr lang="en-US" sz="1600" dirty="0">
+                <a:latin typeface="Tahoma" panose="020B0604030504040204" pitchFamily="34" charset="0"/>
+                <a:ea typeface="Tahoma" panose="020B0604030504040204" pitchFamily="34" charset="0"/>
+                <a:cs typeface="Tahoma" panose="020B0604030504040204" pitchFamily="34" charset="0"/>
+              </a:rPr>
+              <a:t>Public Data availability </a:t>
+            </a:r>
+          </a:p>
+          <a:p>
+            <a:pPr marL="1143000" lvl="3">
+              <a:lnSpc>
+                <a:spcPct val="160000"/>
+              </a:lnSpc>
+              <a:spcBef>
+                <a:spcPts val="0"/>
+              </a:spcBef>
+            </a:pPr>
+            <a:r>
+              <a:rPr lang="en-US" sz="1600" dirty="0">
+                <a:latin typeface="Tahoma" panose="020B0604030504040204" pitchFamily="34" charset="0"/>
+                <a:ea typeface="Tahoma" panose="020B0604030504040204" pitchFamily="34" charset="0"/>
+                <a:cs typeface="Tahoma" panose="020B0604030504040204" pitchFamily="34" charset="0"/>
+              </a:rPr>
+              <a:t>No sensitive data involve </a:t>
+            </a:r>
+          </a:p>
+          <a:p>
+            <a:pPr marL="685800" lvl="2">
+              <a:lnSpc>
+                <a:spcPct val="150000"/>
+              </a:lnSpc>
+              <a:spcBef>
+                <a:spcPts val="0"/>
+              </a:spcBef>
+            </a:pPr>
+            <a:endParaRPr lang="en-US" sz="1200" dirty="0">
               <a:latin typeface="Tahoma" panose="020B0604030504040204" pitchFamily="34" charset="0"/>
               <a:ea typeface="Tahoma" panose="020B0604030504040204" pitchFamily="34" charset="0"/>
               <a:cs typeface="Tahoma" panose="020B0604030504040204" pitchFamily="34" charset="0"/>
@@ -18099,7 +18201,7 @@
         </p:nvSpPr>
         <p:spPr>
           <a:xfrm>
-            <a:off x="0" y="5353551"/>
+            <a:off x="-204117" y="5268564"/>
             <a:ext cx="1052485" cy="1238864"/>
           </a:xfrm>
           <a:custGeom>
@@ -18363,7 +18465,7 @@
             <p:ph idx="1"/>
             <p:extLst>
               <p:ext uri="{D42A27DB-BD31-4B8C-83A1-F6EECF244321}">
-                <p14:modId xmlns:p14="http://schemas.microsoft.com/office/powerpoint/2010/main" val="1767059744"/>
+                <p14:modId xmlns:p14="http://schemas.microsoft.com/office/powerpoint/2010/main" val="2585776400"/>
               </p:ext>
             </p:extLst>
           </p:nvPr>
@@ -18401,8 +18503,8 @@
         </p:blipFill>
         <p:spPr>
           <a:xfrm>
-            <a:off x="1020776" y="2841193"/>
-            <a:ext cx="2471362" cy="2871962"/>
+            <a:off x="838200" y="2086137"/>
+            <a:ext cx="2647950" cy="3213025"/>
           </a:xfrm>
           <a:prstGeom prst="rect">
             <a:avLst/>
@@ -19551,8 +19653,21 @@
                 <a:ea typeface="Tahoma" panose="020B0604030504040204" pitchFamily="34" charset="0"/>
                 <a:cs typeface="Tahoma" panose="020B0604030504040204" pitchFamily="34" charset="0"/>
               </a:rPr>
-              <a:t>Low = Popularity Score &lt;= 30 </a:t>
+              <a:t>Low = Popularity Score &lt;= </a:t>
             </a:r>
+            <a:r>
+              <a:rPr lang="en-US" sz="1200" dirty="0" smtClean="0">
+                <a:latin typeface="Tahoma" panose="020B0604030504040204" pitchFamily="34" charset="0"/>
+                <a:ea typeface="Tahoma" panose="020B0604030504040204" pitchFamily="34" charset="0"/>
+                <a:cs typeface="Tahoma" panose="020B0604030504040204" pitchFamily="34" charset="0"/>
+              </a:rPr>
+              <a:t>33 </a:t>
+            </a:r>
+            <a:endParaRPr lang="en-US" sz="1200" dirty="0">
+              <a:latin typeface="Tahoma" panose="020B0604030504040204" pitchFamily="34" charset="0"/>
+              <a:ea typeface="Tahoma" panose="020B0604030504040204" pitchFamily="34" charset="0"/>
+              <a:cs typeface="Tahoma" panose="020B0604030504040204" pitchFamily="34" charset="0"/>
+            </a:endParaRPr>
           </a:p>
           <a:p>
             <a:pPr lvl="2">
@@ -20954,7 +21069,7 @@
         </p:blipFill>
         <p:spPr>
           <a:xfrm>
-            <a:off x="9375973" y="4296171"/>
+            <a:off x="8950550" y="4206267"/>
             <a:ext cx="1065604" cy="2386148"/>
           </a:xfrm>
           <a:prstGeom prst="rect">
@@ -21000,7 +21115,7 @@
         </p:blipFill>
         <p:spPr>
           <a:xfrm>
-            <a:off x="10435254" y="4296171"/>
+            <a:off x="10016045" y="4206267"/>
             <a:ext cx="1277775" cy="2386148"/>
           </a:xfrm>
           <a:prstGeom prst="rect">
@@ -21794,6 +21909,13 @@
   <p:clrMapOvr>
     <a:masterClrMapping/>
   </p:clrMapOvr>
+  <p:timing>
+    <p:tnLst>
+      <p:par>
+        <p:cTn id="1" dur="indefinite" restart="never" nodeType="tmRoot"/>
+      </p:par>
+    </p:tnLst>
+  </p:timing>
 </p:sld>
 </file>
 

--- a/Final Presentation.pptx
+++ b/Final Presentation.pptx
@@ -18,8 +18,9 @@
     <p:sldId id="266" r:id="rId12"/>
     <p:sldId id="267" r:id="rId13"/>
     <p:sldId id="268" r:id="rId14"/>
-    <p:sldId id="269" r:id="rId15"/>
-    <p:sldId id="270" r:id="rId16"/>
+    <p:sldId id="271" r:id="rId15"/>
+    <p:sldId id="269" r:id="rId16"/>
+    <p:sldId id="270" r:id="rId17"/>
   </p:sldIdLst>
   <p:sldSz cx="12192000" cy="6858000"/>
   <p:notesSz cx="6858000" cy="9144000"/>
@@ -9721,6 +9722,56 @@
             </a:r>
           </a:p>
           <a:p>
+            <a:r>
+              <a:rPr lang="en-US" sz="1600" dirty="0" smtClean="0">
+                <a:latin typeface="Tahoma" panose="020B0604030504040204" pitchFamily="34" charset="0"/>
+                <a:ea typeface="Tahoma" panose="020B0604030504040204" pitchFamily="34" charset="0"/>
+                <a:cs typeface="Tahoma" panose="020B0604030504040204" pitchFamily="34" charset="0"/>
+              </a:rPr>
+              <a:t>Why use Hybrid Database</a:t>
+            </a:r>
+          </a:p>
+          <a:p>
+            <a:pPr lvl="1"/>
+            <a:r>
+              <a:rPr lang="en-US" sz="1400" dirty="0">
+                <a:latin typeface="Tahoma" panose="020B0604030504040204" pitchFamily="34" charset="0"/>
+                <a:ea typeface="Tahoma" panose="020B0604030504040204" pitchFamily="34" charset="0"/>
+                <a:cs typeface="Tahoma" panose="020B0604030504040204" pitchFamily="34" charset="0"/>
+              </a:rPr>
+              <a:t>Implemented both </a:t>
+            </a:r>
+            <a:r>
+              <a:rPr lang="en-US" sz="1400" dirty="0" err="1">
+                <a:latin typeface="Tahoma" panose="020B0604030504040204" pitchFamily="34" charset="0"/>
+                <a:ea typeface="Tahoma" panose="020B0604030504040204" pitchFamily="34" charset="0"/>
+                <a:cs typeface="Tahoma" panose="020B0604030504040204" pitchFamily="34" charset="0"/>
+              </a:rPr>
+              <a:t>NoSQL</a:t>
+            </a:r>
+            <a:r>
+              <a:rPr lang="en-US" sz="1400" dirty="0">
+                <a:latin typeface="Tahoma" panose="020B0604030504040204" pitchFamily="34" charset="0"/>
+                <a:ea typeface="Tahoma" panose="020B0604030504040204" pitchFamily="34" charset="0"/>
+                <a:cs typeface="Tahoma" panose="020B0604030504040204" pitchFamily="34" charset="0"/>
+              </a:rPr>
+              <a:t> and relational storage for flexibility and structured </a:t>
+            </a:r>
+            <a:r>
+              <a:rPr lang="en-US" sz="1400" dirty="0" smtClean="0">
+                <a:latin typeface="Tahoma" panose="020B0604030504040204" pitchFamily="34" charset="0"/>
+                <a:ea typeface="Tahoma" panose="020B0604030504040204" pitchFamily="34" charset="0"/>
+                <a:cs typeface="Tahoma" panose="020B0604030504040204" pitchFamily="34" charset="0"/>
+              </a:rPr>
+              <a:t>querying</a:t>
+            </a:r>
+            <a:endParaRPr lang="en-US" sz="1200" dirty="0" smtClean="0">
+              <a:latin typeface="Tahoma" panose="020B0604030504040204" pitchFamily="34" charset="0"/>
+              <a:ea typeface="Tahoma" panose="020B0604030504040204" pitchFamily="34" charset="0"/>
+              <a:cs typeface="Tahoma" panose="020B0604030504040204" pitchFamily="34" charset="0"/>
+            </a:endParaRPr>
+          </a:p>
+          <a:p>
             <a:endParaRPr lang="en-US" sz="1600" dirty="0">
               <a:latin typeface="Tahoma" panose="020B0604030504040204" pitchFamily="34" charset="0"/>
               <a:ea typeface="Tahoma" panose="020B0604030504040204" pitchFamily="34" charset="0"/>
@@ -9768,7 +9819,7 @@
         </p:blipFill>
         <p:spPr>
           <a:xfrm>
-            <a:off x="7916553" y="3274973"/>
+            <a:off x="8972550" y="3355185"/>
             <a:ext cx="3075297" cy="3478252"/>
           </a:xfrm>
           <a:prstGeom prst="rect">
@@ -10637,82 +10688,172 @@
           </a:xfrm>
         </p:spPr>
         <p:txBody>
-          <a:bodyPr/>
+          <a:bodyPr>
+            <a:normAutofit/>
+          </a:bodyPr>
           <a:lstStyle/>
           <a:p>
             <a:r>
-              <a:rPr lang="en-US" dirty="0" smtClean="0"/>
+              <a:rPr lang="en-US" sz="1600" dirty="0">
+                <a:latin typeface="Tahoma" panose="020B0604030504040204" pitchFamily="34" charset="0"/>
+                <a:ea typeface="Tahoma" panose="020B0604030504040204" pitchFamily="34" charset="0"/>
+                <a:cs typeface="Tahoma" panose="020B0604030504040204" pitchFamily="34" charset="0"/>
+              </a:rPr>
               <a:t>Unit Testing</a:t>
             </a:r>
           </a:p>
           <a:p>
-            <a:pPr lvl="1"/>
+            <a:pPr marL="685800" lvl="2">
+              <a:spcBef>
+                <a:spcPts val="1000"/>
+              </a:spcBef>
+            </a:pPr>
             <a:r>
-              <a:rPr lang="en-US" dirty="0" err="1"/>
+              <a:rPr lang="en-US" sz="1400" dirty="0" err="1">
+                <a:latin typeface="Tahoma" panose="020B0604030504040204" pitchFamily="34" charset="0"/>
+                <a:ea typeface="Tahoma" panose="020B0604030504040204" pitchFamily="34" charset="0"/>
+                <a:cs typeface="Tahoma" panose="020B0604030504040204" pitchFamily="34" charset="0"/>
+              </a:rPr>
               <a:t>test_feature_engineering</a:t>
             </a:r>
             <a:r>
-              <a:rPr lang="en-US" dirty="0"/>
+              <a:rPr lang="en-US" sz="1400" dirty="0">
+                <a:latin typeface="Tahoma" panose="020B0604030504040204" pitchFamily="34" charset="0"/>
+                <a:ea typeface="Tahoma" panose="020B0604030504040204" pitchFamily="34" charset="0"/>
+                <a:cs typeface="Tahoma" panose="020B0604030504040204" pitchFamily="34" charset="0"/>
+              </a:rPr>
               <a:t>(self)</a:t>
             </a:r>
           </a:p>
           <a:p>
-            <a:pPr lvl="1"/>
+            <a:pPr marL="685800" lvl="2">
+              <a:spcBef>
+                <a:spcPts val="1000"/>
+              </a:spcBef>
+            </a:pPr>
             <a:r>
-              <a:rPr lang="en-US" dirty="0" err="1"/>
+              <a:rPr lang="en-US" sz="1400" dirty="0" err="1" smtClean="0">
+                <a:latin typeface="Tahoma" panose="020B0604030504040204" pitchFamily="34" charset="0"/>
+                <a:ea typeface="Tahoma" panose="020B0604030504040204" pitchFamily="34" charset="0"/>
+                <a:cs typeface="Tahoma" panose="020B0604030504040204" pitchFamily="34" charset="0"/>
+              </a:rPr>
               <a:t>test_encoding</a:t>
             </a:r>
             <a:r>
-              <a:rPr lang="en-US" dirty="0"/>
-              <a:t>(self)</a:t>
+              <a:rPr lang="en-US" sz="1400" dirty="0" smtClean="0">
+                <a:latin typeface="Tahoma" panose="020B0604030504040204" pitchFamily="34" charset="0"/>
+                <a:ea typeface="Tahoma" panose="020B0604030504040204" pitchFamily="34" charset="0"/>
+                <a:cs typeface="Tahoma" panose="020B0604030504040204" pitchFamily="34" charset="0"/>
+              </a:rPr>
+              <a:t>(self</a:t>
             </a:r>
-          </a:p>
-          <a:p>
-            <a:pPr lvl="1"/>
             <a:r>
-              <a:rPr lang="en-US" dirty="0" err="1"/>
+              <a:rPr lang="en-US" sz="1400" dirty="0">
+                <a:latin typeface="Tahoma" panose="020B0604030504040204" pitchFamily="34" charset="0"/>
+                <a:ea typeface="Tahoma" panose="020B0604030504040204" pitchFamily="34" charset="0"/>
+                <a:cs typeface="Tahoma" panose="020B0604030504040204" pitchFamily="34" charset="0"/>
+              </a:rPr>
+              <a:t>)</a:t>
+            </a:r>
+          </a:p>
+          <a:p>
+            <a:pPr marL="685800" lvl="2">
+              <a:spcBef>
+                <a:spcPts val="1000"/>
+              </a:spcBef>
+            </a:pPr>
+            <a:r>
+              <a:rPr lang="en-US" sz="1400" dirty="0" err="1">
+                <a:latin typeface="Tahoma" panose="020B0604030504040204" pitchFamily="34" charset="0"/>
+                <a:ea typeface="Tahoma" panose="020B0604030504040204" pitchFamily="34" charset="0"/>
+                <a:cs typeface="Tahoma" panose="020B0604030504040204" pitchFamily="34" charset="0"/>
+              </a:rPr>
               <a:t>test_scaling</a:t>
             </a:r>
             <a:r>
-              <a:rPr lang="en-US" dirty="0"/>
+              <a:rPr lang="en-US" sz="1400" dirty="0">
+                <a:latin typeface="Tahoma" panose="020B0604030504040204" pitchFamily="34" charset="0"/>
+                <a:ea typeface="Tahoma" panose="020B0604030504040204" pitchFamily="34" charset="0"/>
+                <a:cs typeface="Tahoma" panose="020B0604030504040204" pitchFamily="34" charset="0"/>
+              </a:rPr>
               <a:t>(self</a:t>
             </a:r>
             <a:r>
-              <a:rPr lang="en-US" dirty="0" smtClean="0"/>
+              <a:rPr lang="en-US" sz="1400" dirty="0">
+                <a:latin typeface="Tahoma" panose="020B0604030504040204" pitchFamily="34" charset="0"/>
+                <a:ea typeface="Tahoma" panose="020B0604030504040204" pitchFamily="34" charset="0"/>
+                <a:cs typeface="Tahoma" panose="020B0604030504040204" pitchFamily="34" charset="0"/>
+              </a:rPr>
               <a:t>)</a:t>
             </a:r>
           </a:p>
           <a:p>
             <a:r>
-              <a:rPr lang="en-US" dirty="0" smtClean="0"/>
+              <a:rPr lang="en-US" sz="1600" dirty="0">
+                <a:latin typeface="Tahoma" panose="020B0604030504040204" pitchFamily="34" charset="0"/>
+                <a:ea typeface="Tahoma" panose="020B0604030504040204" pitchFamily="34" charset="0"/>
+                <a:cs typeface="Tahoma" panose="020B0604030504040204" pitchFamily="34" charset="0"/>
+              </a:rPr>
               <a:t>Integration Testing</a:t>
             </a:r>
           </a:p>
           <a:p>
-            <a:pPr lvl="1"/>
+            <a:pPr marL="685800" lvl="2">
+              <a:spcBef>
+                <a:spcPts val="1000"/>
+              </a:spcBef>
+            </a:pPr>
             <a:r>
-              <a:rPr lang="en-US" dirty="0" err="1"/>
+              <a:rPr lang="en-US" sz="1400" dirty="0" err="1">
+                <a:latin typeface="Tahoma" panose="020B0604030504040204" pitchFamily="34" charset="0"/>
+                <a:ea typeface="Tahoma" panose="020B0604030504040204" pitchFamily="34" charset="0"/>
+                <a:cs typeface="Tahoma" panose="020B0604030504040204" pitchFamily="34" charset="0"/>
+              </a:rPr>
               <a:t>test_full_pipeline</a:t>
             </a:r>
             <a:r>
-              <a:rPr lang="en-US" dirty="0"/>
+              <a:rPr lang="en-US" sz="1400" dirty="0">
+                <a:latin typeface="Tahoma" panose="020B0604030504040204" pitchFamily="34" charset="0"/>
+                <a:ea typeface="Tahoma" panose="020B0604030504040204" pitchFamily="34" charset="0"/>
+                <a:cs typeface="Tahoma" panose="020B0604030504040204" pitchFamily="34" charset="0"/>
+              </a:rPr>
               <a:t>(self)</a:t>
             </a:r>
           </a:p>
           <a:p>
-            <a:pPr lvl="1"/>
+            <a:pPr marL="685800" lvl="2">
+              <a:spcBef>
+                <a:spcPts val="1000"/>
+              </a:spcBef>
+            </a:pPr>
             <a:r>
-              <a:rPr lang="en-US" dirty="0" err="1"/>
+              <a:rPr lang="en-US" sz="1400" dirty="0" err="1">
+                <a:latin typeface="Tahoma" panose="020B0604030504040204" pitchFamily="34" charset="0"/>
+                <a:ea typeface="Tahoma" panose="020B0604030504040204" pitchFamily="34" charset="0"/>
+                <a:cs typeface="Tahoma" panose="020B0604030504040204" pitchFamily="34" charset="0"/>
+              </a:rPr>
               <a:t>test_full_pipeline_noerror</a:t>
             </a:r>
             <a:r>
-              <a:rPr lang="en-US" dirty="0"/>
+              <a:rPr lang="en-US" sz="1400" dirty="0">
+                <a:latin typeface="Tahoma" panose="020B0604030504040204" pitchFamily="34" charset="0"/>
+                <a:ea typeface="Tahoma" panose="020B0604030504040204" pitchFamily="34" charset="0"/>
+                <a:cs typeface="Tahoma" panose="020B0604030504040204" pitchFamily="34" charset="0"/>
+              </a:rPr>
               <a:t>(self)</a:t>
             </a:r>
           </a:p>
           <a:p>
-            <a:pPr lvl="1"/>
-            <a:endParaRPr lang="en-US" dirty="0"/>
+            <a:pPr marL="228600" lvl="1">
+              <a:spcBef>
+                <a:spcPts val="1000"/>
+              </a:spcBef>
+            </a:pPr>
+            <a:endParaRPr lang="en-US" sz="1600" dirty="0">
+              <a:latin typeface="Tahoma" panose="020B0604030504040204" pitchFamily="34" charset="0"/>
+              <a:ea typeface="Tahoma" panose="020B0604030504040204" pitchFamily="34" charset="0"/>
+              <a:cs typeface="Tahoma" panose="020B0604030504040204" pitchFamily="34" charset="0"/>
+            </a:endParaRPr>
           </a:p>
         </p:txBody>
       </p:sp>
@@ -12464,6 +12605,147 @@
           <a:lstStyle/>
           <a:p>
             <a:r>
+              <a:rPr lang="en-US" sz="2800" b="1" dirty="0" smtClean="0">
+                <a:solidFill>
+                  <a:srgbClr val="002060"/>
+                </a:solidFill>
+                <a:latin typeface="Tahoma" panose="020B0604030504040204" pitchFamily="34" charset="0"/>
+                <a:ea typeface="Tahoma" panose="020B0604030504040204" pitchFamily="34" charset="0"/>
+                <a:cs typeface="Tahoma" panose="020B0604030504040204" pitchFamily="34" charset="0"/>
+              </a:rPr>
+              <a:t>COMPLEXITY OF THE PROJECT</a:t>
+            </a:r>
+            <a:endParaRPr lang="en-US" sz="2800" dirty="0"/>
+          </a:p>
+        </p:txBody>
+      </p:sp>
+      <p:sp>
+        <p:nvSpPr>
+          <p:cNvPr id="3" name="Content Placeholder 2"/>
+          <p:cNvSpPr>
+            <a:spLocks noGrp="1"/>
+          </p:cNvSpPr>
+          <p:nvPr>
+            <p:ph idx="1"/>
+          </p:nvPr>
+        </p:nvSpPr>
+        <p:spPr>
+          <a:xfrm>
+            <a:off x="838200" y="1276985"/>
+            <a:ext cx="10515600" cy="4351338"/>
+          </a:xfrm>
+        </p:spPr>
+        <p:txBody>
+          <a:bodyPr>
+            <a:normAutofit/>
+          </a:bodyPr>
+          <a:lstStyle/>
+          <a:p>
+            <a:r>
+              <a:rPr lang="en-US" sz="1600" dirty="0">
+                <a:latin typeface="Tahoma" panose="020B0604030504040204" pitchFamily="34" charset="0"/>
+                <a:ea typeface="Tahoma" panose="020B0604030504040204" pitchFamily="34" charset="0"/>
+                <a:cs typeface="Tahoma" panose="020B0604030504040204" pitchFamily="34" charset="0"/>
+              </a:rPr>
+              <a:t>Collecting data from multiple resources</a:t>
+            </a:r>
+          </a:p>
+          <a:p>
+            <a:r>
+              <a:rPr lang="en-US" sz="1600" dirty="0">
+                <a:latin typeface="Tahoma" panose="020B0604030504040204" pitchFamily="34" charset="0"/>
+                <a:ea typeface="Tahoma" panose="020B0604030504040204" pitchFamily="34" charset="0"/>
+                <a:cs typeface="Tahoma" panose="020B0604030504040204" pitchFamily="34" charset="0"/>
+              </a:rPr>
+              <a:t>Custom feature engineering including a weighted popularity score</a:t>
+            </a:r>
+          </a:p>
+          <a:p>
+            <a:r>
+              <a:rPr lang="en-US" sz="1600" dirty="0">
+                <a:latin typeface="Tahoma" panose="020B0604030504040204" pitchFamily="34" charset="0"/>
+                <a:ea typeface="Tahoma" panose="020B0604030504040204" pitchFamily="34" charset="0"/>
+                <a:cs typeface="Tahoma" panose="020B0604030504040204" pitchFamily="34" charset="0"/>
+              </a:rPr>
+              <a:t>Full preprocessing pipeline with cat codes and scaling</a:t>
+            </a:r>
+          </a:p>
+          <a:p>
+            <a:r>
+              <a:rPr lang="en-US" sz="1600" dirty="0">
+                <a:latin typeface="Tahoma" panose="020B0604030504040204" pitchFamily="34" charset="0"/>
+                <a:ea typeface="Tahoma" panose="020B0604030504040204" pitchFamily="34" charset="0"/>
+                <a:cs typeface="Tahoma" panose="020B0604030504040204" pitchFamily="34" charset="0"/>
+              </a:rPr>
+              <a:t>Hybrid database design using </a:t>
+            </a:r>
+            <a:r>
+              <a:rPr lang="en-US" sz="1600" dirty="0" err="1">
+                <a:latin typeface="Tahoma" panose="020B0604030504040204" pitchFamily="34" charset="0"/>
+                <a:ea typeface="Tahoma" panose="020B0604030504040204" pitchFamily="34" charset="0"/>
+                <a:cs typeface="Tahoma" panose="020B0604030504040204" pitchFamily="34" charset="0"/>
+              </a:rPr>
+              <a:t>MongoDB</a:t>
+            </a:r>
+            <a:r>
+              <a:rPr lang="en-US" sz="1600" dirty="0">
+                <a:latin typeface="Tahoma" panose="020B0604030504040204" pitchFamily="34" charset="0"/>
+                <a:ea typeface="Tahoma" panose="020B0604030504040204" pitchFamily="34" charset="0"/>
+                <a:cs typeface="Tahoma" panose="020B0604030504040204" pitchFamily="34" charset="0"/>
+              </a:rPr>
+              <a:t> and SQLite</a:t>
+            </a:r>
+          </a:p>
+        </p:txBody>
+      </p:sp>
+    </p:spTree>
+    <p:extLst>
+      <p:ext uri="{BB962C8B-B14F-4D97-AF65-F5344CB8AC3E}">
+        <p14:creationId xmlns:p14="http://schemas.microsoft.com/office/powerpoint/2010/main" val="557934619"/>
+      </p:ext>
+    </p:extLst>
+  </p:cSld>
+  <p:clrMapOvr>
+    <a:masterClrMapping/>
+  </p:clrMapOvr>
+</p:sld>
+</file>
+
+<file path=ppt/slides/slide15.xml><?xml version="1.0" encoding="utf-8"?>
+<p:sld xmlns:a="http://schemas.openxmlformats.org/drawingml/2006/main" xmlns:r="http://schemas.openxmlformats.org/officeDocument/2006/relationships" xmlns:p="http://schemas.openxmlformats.org/presentationml/2006/main">
+  <p:cSld>
+    <p:spTree>
+      <p:nvGrpSpPr>
+        <p:cNvPr id="1" name=""/>
+        <p:cNvGrpSpPr/>
+        <p:nvPr/>
+      </p:nvGrpSpPr>
+      <p:grpSpPr>
+        <a:xfrm>
+          <a:off x="0" y="0"/>
+          <a:ext cx="0" cy="0"/>
+          <a:chOff x="0" y="0"/>
+          <a:chExt cx="0" cy="0"/>
+        </a:xfrm>
+      </p:grpSpPr>
+      <p:sp>
+        <p:nvSpPr>
+          <p:cNvPr id="2" name="Title 1"/>
+          <p:cNvSpPr>
+            <a:spLocks noGrp="1"/>
+          </p:cNvSpPr>
+          <p:nvPr>
+            <p:ph type="title"/>
+          </p:nvPr>
+        </p:nvSpPr>
+        <p:spPr/>
+        <p:txBody>
+          <a:bodyPr>
+            <a:normAutofit/>
+          </a:bodyPr>
+          <a:lstStyle/>
+          <a:p>
+            <a:r>
               <a:rPr lang="en-US" sz="2800" b="1" dirty="0">
                 <a:solidFill>
                   <a:srgbClr val="002060"/>
@@ -13321,7 +13603,7 @@
 </p:sld>
 </file>
 
-<file path=ppt/slides/slide15.xml><?xml version="1.0" encoding="utf-8"?>
+<file path=ppt/slides/slide16.xml><?xml version="1.0" encoding="utf-8"?>
 <p:sld xmlns:a="http://schemas.openxmlformats.org/drawingml/2006/main" xmlns:r="http://schemas.openxmlformats.org/officeDocument/2006/relationships" xmlns:p="http://schemas.openxmlformats.org/presentationml/2006/main">
   <p:cSld>
     <p:spTree>
@@ -14122,15 +14404,15 @@
         </p:nvSpPr>
         <p:spPr>
           <a:xfrm>
-            <a:off x="2976283" y="2321877"/>
-            <a:ext cx="6096000" cy="1107996"/>
+            <a:off x="2445059" y="2330585"/>
+            <a:ext cx="7961683" cy="1446550"/>
           </a:xfrm>
           <a:prstGeom prst="rect">
             <a:avLst/>
           </a:prstGeom>
         </p:spPr>
         <p:txBody>
-          <a:bodyPr>
+          <a:bodyPr wrap="square">
             <a:spAutoFit/>
           </a:bodyPr>
           <a:lstStyle/>
@@ -14144,7 +14426,7 @@
               </a:tabLst>
             </a:pPr>
             <a:r>
-              <a:rPr lang="en-US" sz="6600" b="1" dirty="0" smtClean="0">
+              <a:rPr lang="en-US" sz="8800" b="1" dirty="0" smtClean="0">
                 <a:solidFill>
                   <a:srgbClr val="002060"/>
                 </a:solidFill>
@@ -14154,7 +14436,7 @@
               </a:rPr>
               <a:t>THANK YOU!</a:t>
             </a:r>
-            <a:endParaRPr lang="fr-FR" sz="6600" b="1" dirty="0">
+            <a:endParaRPr lang="fr-FR" sz="8800" b="1" dirty="0">
               <a:solidFill>
                 <a:srgbClr val="002060"/>
               </a:solidFill>
